--- a/03-课件PPT/讲次版/第3章-3-讲次 3-3 · State Machine 与 Che.pptx
+++ b/03-课件PPT/讲次版/第3章-3-讲次 3-3 · State Machine 与 Che.pptx
@@ -6144,7 +6144,7 @@
                 </a:solidFill>
                 <a:latin typeface="PingFang SC"/>
               </a:rPr>
-              <a:t>历史观察完整带入→finalize|实测:test_checkpoint_resumes</a:t>
+              <a:t>历史观察完整带入→finalize</a:t>
             </a:r>
           </a:p>
         </p:txBody>
@@ -8604,21 +8604,391 @@
                 </a:solidFill>
                 <a:latin typeface="PingFang SC"/>
               </a:rPr>
-              <a:t>kill/resume 演示实录,$ kill -9 &lt;agent-pid&gt;  # 模拟崩溃;进程消失,Checkpoint 已落盘;$ loop2 = AgentLoop(resume_from=run_id);COMPLETED  历史观察完整带回;# 每轮 save(深拷贝)是底气</a:t>
-            </a:r>
-          </a:p>
-        </p:txBody>
-      </p:sp>
-      <p:sp>
-        <p:nvSpPr>
-          <p:cNvPr id="5" name="TextBox 4"/>
+              <a:t>kill/resume 演示实录</a:t>
+            </a:r>
+          </a:p>
+        </p:txBody>
+      </p:sp>
+      <p:sp>
+        <p:nvSpPr>
+          <p:cNvPr id="5" name="Rounded Rectangle 4"/>
+          <p:cNvSpPr/>
+          <p:nvPr/>
+        </p:nvSpPr>
+        <p:spPr>
+          <a:xfrm>
+            <a:off x="1333500" y="1047750"/>
+            <a:ext cx="9525000" cy="2667000"/>
+          </a:xfrm>
+          <a:prstGeom prst="roundRect">
+            <a:avLst>
+              <a:gd name="adj" fmla="val 8000"/>
+            </a:avLst>
+          </a:prstGeom>
+          <a:solidFill>
+            <a:srgbClr val="0D1117"/>
+          </a:solidFill>
+          <a:ln>
+            <a:noFill/>
+          </a:ln>
+          <a:effectLst/>
+        </p:spPr>
+        <p:style>
+          <a:lnRef idx="1">
+            <a:schemeClr val="accent1"/>
+          </a:lnRef>
+          <a:fillRef idx="3">
+            <a:schemeClr val="accent1"/>
+          </a:fillRef>
+          <a:effectRef idx="2">
+            <a:schemeClr val="accent1"/>
+          </a:effectRef>
+          <a:fontRef idx="minor">
+            <a:schemeClr val="lt1"/>
+          </a:fontRef>
+        </p:style>
+        <p:txBody>
+          <a:bodyPr rtlCol="0" anchor="ctr"/>
+          <a:lstStyle/>
+          <a:p>
+            <a:pPr algn="ctr"/>
+          </a:p>
+        </p:txBody>
+      </p:sp>
+      <p:sp>
+        <p:nvSpPr>
+          <p:cNvPr id="6" name="Rectangle 5"/>
+          <p:cNvSpPr/>
+          <p:nvPr/>
+        </p:nvSpPr>
+        <p:spPr>
+          <a:xfrm>
+            <a:off x="1333500" y="1047750"/>
+            <a:ext cx="9525000" cy="381000"/>
+          </a:xfrm>
+          <a:prstGeom prst="rect">
+            <a:avLst/>
+          </a:prstGeom>
+          <a:solidFill>
+            <a:srgbClr val="1F2937"/>
+          </a:solidFill>
+          <a:ln>
+            <a:noFill/>
+          </a:ln>
+          <a:effectLst/>
+        </p:spPr>
+        <p:style>
+          <a:lnRef idx="1">
+            <a:schemeClr val="accent1"/>
+          </a:lnRef>
+          <a:fillRef idx="3">
+            <a:schemeClr val="accent1"/>
+          </a:fillRef>
+          <a:effectRef idx="2">
+            <a:schemeClr val="accent1"/>
+          </a:effectRef>
+          <a:fontRef idx="minor">
+            <a:schemeClr val="lt1"/>
+          </a:fontRef>
+        </p:style>
+        <p:txBody>
+          <a:bodyPr rtlCol="0" anchor="ctr"/>
+          <a:lstStyle/>
+          <a:p>
+            <a:pPr algn="ctr"/>
+          </a:p>
+        </p:txBody>
+      </p:sp>
+      <p:sp>
+        <p:nvSpPr>
+          <p:cNvPr id="7" name="Rounded Rectangle 6"/>
+          <p:cNvSpPr/>
+          <p:nvPr/>
+        </p:nvSpPr>
+        <p:spPr>
+          <a:xfrm>
+            <a:off x="1504950" y="1181100"/>
+            <a:ext cx="123825" cy="123825"/>
+          </a:xfrm>
+          <a:prstGeom prst="roundRect">
+            <a:avLst>
+              <a:gd name="adj" fmla="val 8000"/>
+            </a:avLst>
+          </a:prstGeom>
+          <a:solidFill>
+            <a:srgbClr val="F87171"/>
+          </a:solidFill>
+          <a:ln>
+            <a:noFill/>
+          </a:ln>
+          <a:effectLst/>
+        </p:spPr>
+        <p:style>
+          <a:lnRef idx="1">
+            <a:schemeClr val="accent1"/>
+          </a:lnRef>
+          <a:fillRef idx="3">
+            <a:schemeClr val="accent1"/>
+          </a:fillRef>
+          <a:effectRef idx="2">
+            <a:schemeClr val="accent1"/>
+          </a:effectRef>
+          <a:fontRef idx="minor">
+            <a:schemeClr val="lt1"/>
+          </a:fontRef>
+        </p:style>
+        <p:txBody>
+          <a:bodyPr rtlCol="0" anchor="ctr"/>
+          <a:lstStyle/>
+          <a:p>
+            <a:pPr algn="ctr"/>
+          </a:p>
+        </p:txBody>
+      </p:sp>
+      <p:sp>
+        <p:nvSpPr>
+          <p:cNvPr id="8" name="Rounded Rectangle 7"/>
+          <p:cNvSpPr/>
+          <p:nvPr/>
+        </p:nvSpPr>
+        <p:spPr>
+          <a:xfrm>
+            <a:off x="1752600" y="1181100"/>
+            <a:ext cx="123825" cy="123825"/>
+          </a:xfrm>
+          <a:prstGeom prst="roundRect">
+            <a:avLst>
+              <a:gd name="adj" fmla="val 8000"/>
+            </a:avLst>
+          </a:prstGeom>
+          <a:solidFill>
+            <a:srgbClr val="F59E0B"/>
+          </a:solidFill>
+          <a:ln>
+            <a:noFill/>
+          </a:ln>
+          <a:effectLst/>
+        </p:spPr>
+        <p:style>
+          <a:lnRef idx="1">
+            <a:schemeClr val="accent1"/>
+          </a:lnRef>
+          <a:fillRef idx="3">
+            <a:schemeClr val="accent1"/>
+          </a:fillRef>
+          <a:effectRef idx="2">
+            <a:schemeClr val="accent1"/>
+          </a:effectRef>
+          <a:fontRef idx="minor">
+            <a:schemeClr val="lt1"/>
+          </a:fontRef>
+        </p:style>
+        <p:txBody>
+          <a:bodyPr rtlCol="0" anchor="ctr"/>
+          <a:lstStyle/>
+          <a:p>
+            <a:pPr algn="ctr"/>
+          </a:p>
+        </p:txBody>
+      </p:sp>
+      <p:sp>
+        <p:nvSpPr>
+          <p:cNvPr id="9" name="Rounded Rectangle 8"/>
+          <p:cNvSpPr/>
+          <p:nvPr/>
+        </p:nvSpPr>
+        <p:spPr>
+          <a:xfrm>
+            <a:off x="2000250" y="1181100"/>
+            <a:ext cx="123825" cy="123825"/>
+          </a:xfrm>
+          <a:prstGeom prst="roundRect">
+            <a:avLst>
+              <a:gd name="adj" fmla="val 8000"/>
+            </a:avLst>
+          </a:prstGeom>
+          <a:solidFill>
+            <a:srgbClr val="34D399"/>
+          </a:solidFill>
+          <a:ln>
+            <a:noFill/>
+          </a:ln>
+          <a:effectLst/>
+        </p:spPr>
+        <p:style>
+          <a:lnRef idx="1">
+            <a:schemeClr val="accent1"/>
+          </a:lnRef>
+          <a:fillRef idx="3">
+            <a:schemeClr val="accent1"/>
+          </a:fillRef>
+          <a:effectRef idx="2">
+            <a:schemeClr val="accent1"/>
+          </a:effectRef>
+          <a:fontRef idx="minor">
+            <a:schemeClr val="lt1"/>
+          </a:fontRef>
+        </p:style>
+        <p:txBody>
+          <a:bodyPr rtlCol="0" anchor="ctr"/>
+          <a:lstStyle/>
+          <a:p>
+            <a:pPr algn="ctr"/>
+          </a:p>
+        </p:txBody>
+      </p:sp>
+      <p:sp>
+        <p:nvSpPr>
+          <p:cNvPr id="10" name="TextBox 9"/>
           <p:cNvSpPr txBox="1"/>
           <p:nvPr/>
         </p:nvSpPr>
         <p:spPr>
           <a:xfrm>
-            <a:off x="9334500" y="0"/>
-            <a:ext cx="2667000" cy="704850"/>
+            <a:off x="2381250" y="1047750"/>
+            <a:ext cx="8286750" cy="381000"/>
+          </a:xfrm>
+          <a:prstGeom prst="rect">
+            <a:avLst/>
+          </a:prstGeom>
+          <a:noFill/>
+        </p:spPr>
+        <p:txBody>
+          <a:bodyPr wrap="square" anchor="ctr">
+            <a:spAutoFit/>
+          </a:bodyPr>
+          <a:lstStyle/>
+          <a:p>
+            <a:pPr algn="l">
+              <a:lnSpc>
+                <a:spcPct val="100000"/>
+              </a:lnSpc>
+            </a:pPr>
+            <a:r>
+              <a:rPr sz="1100" b="0">
+                <a:solidFill>
+                  <a:srgbClr val="94A3B8"/>
+                </a:solidFill>
+                <a:latin typeface="PingFang SC"/>
+              </a:rPr>
+              <a:t>terminal — 平台实测</a:t>
+            </a:r>
+          </a:p>
+        </p:txBody>
+      </p:sp>
+      <p:sp>
+        <p:nvSpPr>
+          <p:cNvPr id="11" name="TextBox 10"/>
+          <p:cNvSpPr txBox="1"/>
+          <p:nvPr/>
+        </p:nvSpPr>
+        <p:spPr>
+          <a:xfrm>
+            <a:off x="1562100" y="1581150"/>
+            <a:ext cx="9067800" cy="2000250"/>
+          </a:xfrm>
+          <a:prstGeom prst="rect">
+            <a:avLst/>
+          </a:prstGeom>
+          <a:noFill/>
+        </p:spPr>
+        <p:txBody>
+          <a:bodyPr wrap="square">
+            <a:spAutoFit/>
+          </a:bodyPr>
+          <a:lstStyle/>
+          <a:p>
+            <a:pPr>
+              <a:lnSpc>
+                <a:spcPct val="115000"/>
+              </a:lnSpc>
+            </a:pPr>
+            <a:r>
+              <a:rPr sz="1300" b="1">
+                <a:solidFill>
+                  <a:srgbClr val="34D399"/>
+                </a:solidFill>
+                <a:latin typeface="Menlo"/>
+              </a:rPr>
+              <a:t>$ kill -9 &lt;agent-pid&gt;  # 模拟崩溃</a:t>
+            </a:r>
+          </a:p>
+          <a:p>
+            <a:pPr>
+              <a:lnSpc>
+                <a:spcPct val="115000"/>
+              </a:lnSpc>
+            </a:pPr>
+            <a:r>
+              <a:rPr sz="1300">
+                <a:solidFill>
+                  <a:srgbClr val="CBD5E1"/>
+                </a:solidFill>
+                <a:latin typeface="Menlo"/>
+              </a:rPr>
+              <a:t>进程消失,Checkpoint 已落盘</a:t>
+            </a:r>
+          </a:p>
+          <a:p>
+            <a:pPr>
+              <a:lnSpc>
+                <a:spcPct val="115000"/>
+              </a:lnSpc>
+            </a:pPr>
+            <a:r>
+              <a:rPr sz="1300" b="1">
+                <a:solidFill>
+                  <a:srgbClr val="34D399"/>
+                </a:solidFill>
+                <a:latin typeface="Menlo"/>
+              </a:rPr>
+              <a:t>$ loop2 = AgentLoop(resume_from=run_id)</a:t>
+            </a:r>
+          </a:p>
+          <a:p>
+            <a:pPr>
+              <a:lnSpc>
+                <a:spcPct val="115000"/>
+              </a:lnSpc>
+            </a:pPr>
+            <a:r>
+              <a:rPr sz="1300">
+                <a:solidFill>
+                  <a:srgbClr val="CBD5E1"/>
+                </a:solidFill>
+                <a:latin typeface="Menlo"/>
+              </a:rPr>
+              <a:t>COMPLETED  历史观察完整带回</a:t>
+            </a:r>
+          </a:p>
+          <a:p>
+            <a:pPr>
+              <a:lnSpc>
+                <a:spcPct val="115000"/>
+              </a:lnSpc>
+            </a:pPr>
+            <a:r>
+              <a:rPr sz="1300">
+                <a:solidFill>
+                  <a:srgbClr val="94A3B8"/>
+                </a:solidFill>
+                <a:latin typeface="Menlo"/>
+              </a:rPr>
+              <a:t># 每轮 save(深拷贝)是底气</a:t>
+            </a:r>
+          </a:p>
+        </p:txBody>
+      </p:sp>
+      <p:sp>
+        <p:nvSpPr>
+          <p:cNvPr id="12" name="TextBox 11"/>
+          <p:cNvSpPr txBox="1"/>
+          <p:nvPr/>
+        </p:nvSpPr>
+        <p:spPr>
+          <a:xfrm>
+            <a:off x="10287000" y="6534150"/>
+            <a:ext cx="1619250" cy="266700"/>
           </a:xfrm>
           <a:prstGeom prst="rect">
             <a:avLst/>
@@ -8637,351 +9007,6 @@
               </a:lnSpc>
             </a:pPr>
             <a:r>
-              <a:rPr sz="1100" b="0">
-                <a:solidFill>
-                  <a:srgbClr val="94A3B8"/>
-                </a:solidFill>
-                <a:latin typeface="PingFang SC"/>
-              </a:rPr>
-              <a:t>tests 真实复现</a:t>
-            </a:r>
-          </a:p>
-        </p:txBody>
-      </p:sp>
-      <p:sp>
-        <p:nvSpPr>
-          <p:cNvPr id="6" name="Rounded Rectangle 5"/>
-          <p:cNvSpPr/>
-          <p:nvPr/>
-        </p:nvSpPr>
-        <p:spPr>
-          <a:xfrm>
-            <a:off x="1333500" y="952500"/>
-            <a:ext cx="9525000" cy="5048250"/>
-          </a:xfrm>
-          <a:prstGeom prst="roundRect">
-            <a:avLst>
-              <a:gd name="adj" fmla="val 8000"/>
-            </a:avLst>
-          </a:prstGeom>
-          <a:solidFill>
-            <a:srgbClr val="0D1117"/>
-          </a:solidFill>
-          <a:ln>
-            <a:noFill/>
-          </a:ln>
-          <a:effectLst/>
-        </p:spPr>
-        <p:style>
-          <a:lnRef idx="1">
-            <a:schemeClr val="accent1"/>
-          </a:lnRef>
-          <a:fillRef idx="3">
-            <a:schemeClr val="accent1"/>
-          </a:fillRef>
-          <a:effectRef idx="2">
-            <a:schemeClr val="accent1"/>
-          </a:effectRef>
-          <a:fontRef idx="minor">
-            <a:schemeClr val="lt1"/>
-          </a:fontRef>
-        </p:style>
-        <p:txBody>
-          <a:bodyPr rtlCol="0" anchor="ctr"/>
-          <a:lstStyle/>
-          <a:p>
-            <a:pPr algn="ctr"/>
-          </a:p>
-        </p:txBody>
-      </p:sp>
-      <p:sp>
-        <p:nvSpPr>
-          <p:cNvPr id="7" name="Rectangle 6"/>
-          <p:cNvSpPr/>
-          <p:nvPr/>
-        </p:nvSpPr>
-        <p:spPr>
-          <a:xfrm>
-            <a:off x="1333500" y="952500"/>
-            <a:ext cx="9525000" cy="381000"/>
-          </a:xfrm>
-          <a:prstGeom prst="rect">
-            <a:avLst/>
-          </a:prstGeom>
-          <a:solidFill>
-            <a:srgbClr val="1F2937"/>
-          </a:solidFill>
-          <a:ln>
-            <a:noFill/>
-          </a:ln>
-          <a:effectLst/>
-        </p:spPr>
-        <p:style>
-          <a:lnRef idx="1">
-            <a:schemeClr val="accent1"/>
-          </a:lnRef>
-          <a:fillRef idx="3">
-            <a:schemeClr val="accent1"/>
-          </a:fillRef>
-          <a:effectRef idx="2">
-            <a:schemeClr val="accent1"/>
-          </a:effectRef>
-          <a:fontRef idx="minor">
-            <a:schemeClr val="lt1"/>
-          </a:fontRef>
-        </p:style>
-        <p:txBody>
-          <a:bodyPr rtlCol="0" anchor="ctr"/>
-          <a:lstStyle/>
-          <a:p>
-            <a:pPr algn="ctr"/>
-          </a:p>
-        </p:txBody>
-      </p:sp>
-      <p:sp>
-        <p:nvSpPr>
-          <p:cNvPr id="8" name="Rounded Rectangle 7"/>
-          <p:cNvSpPr/>
-          <p:nvPr/>
-        </p:nvSpPr>
-        <p:spPr>
-          <a:xfrm>
-            <a:off x="1504950" y="1085850"/>
-            <a:ext cx="123825" cy="123825"/>
-          </a:xfrm>
-          <a:prstGeom prst="roundRect">
-            <a:avLst>
-              <a:gd name="adj" fmla="val 8000"/>
-            </a:avLst>
-          </a:prstGeom>
-          <a:solidFill>
-            <a:srgbClr val="F87171"/>
-          </a:solidFill>
-          <a:ln>
-            <a:noFill/>
-          </a:ln>
-          <a:effectLst/>
-        </p:spPr>
-        <p:style>
-          <a:lnRef idx="1">
-            <a:schemeClr val="accent1"/>
-          </a:lnRef>
-          <a:fillRef idx="3">
-            <a:schemeClr val="accent1"/>
-          </a:fillRef>
-          <a:effectRef idx="2">
-            <a:schemeClr val="accent1"/>
-          </a:effectRef>
-          <a:fontRef idx="minor">
-            <a:schemeClr val="lt1"/>
-          </a:fontRef>
-        </p:style>
-        <p:txBody>
-          <a:bodyPr rtlCol="0" anchor="ctr"/>
-          <a:lstStyle/>
-          <a:p>
-            <a:pPr algn="ctr"/>
-          </a:p>
-        </p:txBody>
-      </p:sp>
-      <p:sp>
-        <p:nvSpPr>
-          <p:cNvPr id="9" name="Rounded Rectangle 8"/>
-          <p:cNvSpPr/>
-          <p:nvPr/>
-        </p:nvSpPr>
-        <p:spPr>
-          <a:xfrm>
-            <a:off x="1752600" y="1085850"/>
-            <a:ext cx="123825" cy="123825"/>
-          </a:xfrm>
-          <a:prstGeom prst="roundRect">
-            <a:avLst>
-              <a:gd name="adj" fmla="val 8000"/>
-            </a:avLst>
-          </a:prstGeom>
-          <a:solidFill>
-            <a:srgbClr val="F59E0B"/>
-          </a:solidFill>
-          <a:ln>
-            <a:noFill/>
-          </a:ln>
-          <a:effectLst/>
-        </p:spPr>
-        <p:style>
-          <a:lnRef idx="1">
-            <a:schemeClr val="accent1"/>
-          </a:lnRef>
-          <a:fillRef idx="3">
-            <a:schemeClr val="accent1"/>
-          </a:fillRef>
-          <a:effectRef idx="2">
-            <a:schemeClr val="accent1"/>
-          </a:effectRef>
-          <a:fontRef idx="minor">
-            <a:schemeClr val="lt1"/>
-          </a:fontRef>
-        </p:style>
-        <p:txBody>
-          <a:bodyPr rtlCol="0" anchor="ctr"/>
-          <a:lstStyle/>
-          <a:p>
-            <a:pPr algn="ctr"/>
-          </a:p>
-        </p:txBody>
-      </p:sp>
-      <p:sp>
-        <p:nvSpPr>
-          <p:cNvPr id="10" name="Rounded Rectangle 9"/>
-          <p:cNvSpPr/>
-          <p:nvPr/>
-        </p:nvSpPr>
-        <p:spPr>
-          <a:xfrm>
-            <a:off x="2000250" y="1085850"/>
-            <a:ext cx="123825" cy="123825"/>
-          </a:xfrm>
-          <a:prstGeom prst="roundRect">
-            <a:avLst>
-              <a:gd name="adj" fmla="val 8000"/>
-            </a:avLst>
-          </a:prstGeom>
-          <a:solidFill>
-            <a:srgbClr val="34D399"/>
-          </a:solidFill>
-          <a:ln>
-            <a:noFill/>
-          </a:ln>
-          <a:effectLst/>
-        </p:spPr>
-        <p:style>
-          <a:lnRef idx="1">
-            <a:schemeClr val="accent1"/>
-          </a:lnRef>
-          <a:fillRef idx="3">
-            <a:schemeClr val="accent1"/>
-          </a:fillRef>
-          <a:effectRef idx="2">
-            <a:schemeClr val="accent1"/>
-          </a:effectRef>
-          <a:fontRef idx="minor">
-            <a:schemeClr val="lt1"/>
-          </a:fontRef>
-        </p:style>
-        <p:txBody>
-          <a:bodyPr rtlCol="0" anchor="ctr"/>
-          <a:lstStyle/>
-          <a:p>
-            <a:pPr algn="ctr"/>
-          </a:p>
-        </p:txBody>
-      </p:sp>
-      <p:sp>
-        <p:nvSpPr>
-          <p:cNvPr id="11" name="TextBox 10"/>
-          <p:cNvSpPr txBox="1"/>
-          <p:nvPr/>
-        </p:nvSpPr>
-        <p:spPr>
-          <a:xfrm>
-            <a:off x="2381250" y="952500"/>
-            <a:ext cx="8286750" cy="381000"/>
-          </a:xfrm>
-          <a:prstGeom prst="rect">
-            <a:avLst/>
-          </a:prstGeom>
-          <a:noFill/>
-        </p:spPr>
-        <p:txBody>
-          <a:bodyPr wrap="square" anchor="ctr">
-            <a:spAutoFit/>
-          </a:bodyPr>
-          <a:lstStyle/>
-          <a:p>
-            <a:pPr algn="l">
-              <a:lnSpc>
-                <a:spcPct val="100000"/>
-              </a:lnSpc>
-            </a:pPr>
-            <a:r>
-              <a:rPr sz="1100" b="0">
-                <a:solidFill>
-                  <a:srgbClr val="94A3B8"/>
-                </a:solidFill>
-                <a:latin typeface="PingFang SC"/>
-              </a:rPr>
-              <a:t>terminal — 平台实测</a:t>
-            </a:r>
-          </a:p>
-        </p:txBody>
-      </p:sp>
-      <p:sp>
-        <p:nvSpPr>
-          <p:cNvPr id="12" name="TextBox 11"/>
-          <p:cNvSpPr txBox="1"/>
-          <p:nvPr/>
-        </p:nvSpPr>
-        <p:spPr>
-          <a:xfrm>
-            <a:off x="1562100" y="1485900"/>
-            <a:ext cx="9067800" cy="4381500"/>
-          </a:xfrm>
-          <a:prstGeom prst="rect">
-            <a:avLst/>
-          </a:prstGeom>
-          <a:noFill/>
-        </p:spPr>
-        <p:txBody>
-          <a:bodyPr wrap="square">
-            <a:spAutoFit/>
-          </a:bodyPr>
-          <a:lstStyle/>
-          <a:p>
-            <a:pPr>
-              <a:lnSpc>
-                <a:spcPct val="115000"/>
-              </a:lnSpc>
-            </a:pPr>
-            <a:r>
-              <a:rPr sz="1300">
-                <a:solidFill>
-                  <a:srgbClr val="CBD5E1"/>
-                </a:solidFill>
-                <a:latin typeface="Menlo"/>
-              </a:rPr>
-              <a:t>tests 真实复现</a:t>
-            </a:r>
-          </a:p>
-        </p:txBody>
-      </p:sp>
-      <p:sp>
-        <p:nvSpPr>
-          <p:cNvPr id="13" name="TextBox 12"/>
-          <p:cNvSpPr txBox="1"/>
-          <p:nvPr/>
-        </p:nvSpPr>
-        <p:spPr>
-          <a:xfrm>
-            <a:off x="10287000" y="6534150"/>
-            <a:ext cx="1619250" cy="266700"/>
-          </a:xfrm>
-          <a:prstGeom prst="rect">
-            <a:avLst/>
-          </a:prstGeom>
-          <a:noFill/>
-        </p:spPr>
-        <p:txBody>
-          <a:bodyPr wrap="square" anchor="ctr">
-            <a:spAutoFit/>
-          </a:bodyPr>
-          <a:lstStyle/>
-          <a:p>
-            <a:pPr algn="r">
-              <a:lnSpc>
-                <a:spcPct val="100000"/>
-              </a:lnSpc>
-            </a:pPr>
-            <a:r>
               <a:rPr sz="900" b="0">
                 <a:solidFill>
                   <a:srgbClr val="94A3B8"/>
@@ -8995,7 +9020,7 @@
       </p:sp>
       <p:sp>
         <p:nvSpPr>
-          <p:cNvPr id="14" name="TextBox 13"/>
+          <p:cNvPr id="13" name="TextBox 12"/>
           <p:cNvSpPr txBox="1"/>
           <p:nvPr/>
         </p:nvSpPr>
@@ -12115,7 +12140,7 @@
                 </a:solidFill>
                 <a:latin typeface="PingFang SC"/>
               </a:rPr>
-              <a:t>5. 拒绝→cancelled|接管记录进审计</a:t>
+              <a:t>5. 拒绝→cancelled</a:t>
             </a:r>
           </a:p>
         </p:txBody>
@@ -14946,14 +14971,1376 @@
       </p:sp>
       <p:sp>
         <p:nvSpPr>
-          <p:cNvPr id="5" name="TextBox 4"/>
+          <p:cNvPr id="5" name="Rounded Rectangle 4"/>
+          <p:cNvSpPr/>
+          <p:nvPr/>
+        </p:nvSpPr>
+        <p:spPr>
+          <a:xfrm>
+            <a:off x="1847850" y="914400"/>
+            <a:ext cx="8877300" cy="1100137"/>
+          </a:xfrm>
+          <a:prstGeom prst="roundRect">
+            <a:avLst>
+              <a:gd name="adj" fmla="val 8000"/>
+            </a:avLst>
+          </a:prstGeom>
+          <a:solidFill>
+            <a:srgbClr val="F1F5F9"/>
+          </a:solidFill>
+          <a:ln>
+            <a:noFill/>
+          </a:ln>
+          <a:effectLst/>
+        </p:spPr>
+        <p:style>
+          <a:lnRef idx="1">
+            <a:schemeClr val="accent1"/>
+          </a:lnRef>
+          <a:fillRef idx="3">
+            <a:schemeClr val="accent1"/>
+          </a:fillRef>
+          <a:effectRef idx="2">
+            <a:schemeClr val="accent1"/>
+          </a:effectRef>
+          <a:fontRef idx="minor">
+            <a:schemeClr val="lt1"/>
+          </a:fontRef>
+        </p:style>
+        <p:txBody>
+          <a:bodyPr rtlCol="0" anchor="ctr"/>
+          <a:lstStyle/>
+          <a:p>
+            <a:pPr algn="ctr"/>
+          </a:p>
+        </p:txBody>
+      </p:sp>
+      <p:sp>
+        <p:nvSpPr>
+          <p:cNvPr id="6" name="TextBox 5"/>
           <p:cNvSpPr txBox="1"/>
           <p:nvPr/>
         </p:nvSpPr>
         <p:spPr>
           <a:xfrm>
-            <a:off x="9334500" y="0"/>
-            <a:ext cx="2667000" cy="704850"/>
+            <a:off x="1962150" y="685800"/>
+            <a:ext cx="1905000" cy="209550"/>
+          </a:xfrm>
+          <a:prstGeom prst="rect">
+            <a:avLst/>
+          </a:prstGeom>
+          <a:noFill/>
+        </p:spPr>
+        <p:txBody>
+          <a:bodyPr wrap="square" anchor="ctr">
+            <a:spAutoFit/>
+          </a:bodyPr>
+          <a:lstStyle/>
+          <a:p>
+            <a:pPr algn="l">
+              <a:lnSpc>
+                <a:spcPct val="100000"/>
+              </a:lnSpc>
+            </a:pPr>
+            <a:r>
+              <a:rPr sz="1100" b="1">
+                <a:solidFill>
+                  <a:srgbClr val="2563EB"/>
+                </a:solidFill>
+                <a:latin typeface="PingFang SC"/>
+              </a:rPr>
+              <a:t>L1</a:t>
+            </a:r>
+          </a:p>
+        </p:txBody>
+      </p:sp>
+      <p:sp>
+        <p:nvSpPr>
+          <p:cNvPr id="7" name="Rounded Rectangle 6"/>
+          <p:cNvSpPr/>
+          <p:nvPr/>
+        </p:nvSpPr>
+        <p:spPr>
+          <a:xfrm>
+            <a:off x="1905000" y="952500"/>
+            <a:ext cx="8763000" cy="1023937"/>
+          </a:xfrm>
+          <a:prstGeom prst="roundRect">
+            <a:avLst>
+              <a:gd name="adj" fmla="val 8000"/>
+            </a:avLst>
+          </a:prstGeom>
+          <a:solidFill>
+            <a:srgbClr val="FFFFFF"/>
+          </a:solidFill>
+          <a:ln w="12700">
+            <a:solidFill>
+              <a:srgbClr val="2563EB"/>
+            </a:solidFill>
+          </a:ln>
+          <a:effectLst/>
+        </p:spPr>
+        <p:style>
+          <a:lnRef idx="1">
+            <a:schemeClr val="accent1"/>
+          </a:lnRef>
+          <a:fillRef idx="3">
+            <a:schemeClr val="accent1"/>
+          </a:fillRef>
+          <a:effectRef idx="2">
+            <a:schemeClr val="accent1"/>
+          </a:effectRef>
+          <a:fontRef idx="minor">
+            <a:schemeClr val="lt1"/>
+          </a:fontRef>
+        </p:style>
+        <p:txBody>
+          <a:bodyPr rtlCol="0" anchor="ctr"/>
+          <a:lstStyle/>
+          <a:p>
+            <a:pPr algn="ctr"/>
+          </a:p>
+        </p:txBody>
+      </p:sp>
+      <p:sp>
+        <p:nvSpPr>
+          <p:cNvPr id="8" name="Rectangle 7"/>
+          <p:cNvSpPr/>
+          <p:nvPr/>
+        </p:nvSpPr>
+        <p:spPr>
+          <a:xfrm>
+            <a:off x="1905000" y="952500"/>
+            <a:ext cx="47625" cy="1023937"/>
+          </a:xfrm>
+          <a:prstGeom prst="rect">
+            <a:avLst/>
+          </a:prstGeom>
+          <a:solidFill>
+            <a:srgbClr val="2563EB"/>
+          </a:solidFill>
+          <a:ln>
+            <a:noFill/>
+          </a:ln>
+          <a:effectLst/>
+        </p:spPr>
+        <p:style>
+          <a:lnRef idx="1">
+            <a:schemeClr val="accent1"/>
+          </a:lnRef>
+          <a:fillRef idx="3">
+            <a:schemeClr val="accent1"/>
+          </a:fillRef>
+          <a:effectRef idx="2">
+            <a:schemeClr val="accent1"/>
+          </a:effectRef>
+          <a:fontRef idx="minor">
+            <a:schemeClr val="lt1"/>
+          </a:fontRef>
+        </p:style>
+        <p:txBody>
+          <a:bodyPr rtlCol="0" anchor="ctr"/>
+          <a:lstStyle/>
+          <a:p>
+            <a:pPr algn="ctr"/>
+          </a:p>
+        </p:txBody>
+      </p:sp>
+      <p:sp>
+        <p:nvSpPr>
+          <p:cNvPr id="9" name="TextBox 8"/>
+          <p:cNvSpPr txBox="1"/>
+          <p:nvPr/>
+        </p:nvSpPr>
+        <p:spPr>
+          <a:xfrm>
+            <a:off x="2057400" y="952500"/>
+            <a:ext cx="8496300" cy="1023937"/>
+          </a:xfrm>
+          <a:prstGeom prst="rect">
+            <a:avLst/>
+          </a:prstGeom>
+          <a:noFill/>
+        </p:spPr>
+        <p:txBody>
+          <a:bodyPr wrap="none" anchor="ctr">
+            <a:spAutoFit/>
+          </a:bodyPr>
+          <a:lstStyle/>
+          <a:p>
+            <a:pPr algn="l">
+              <a:lnSpc>
+                <a:spcPct val="115000"/>
+              </a:lnSpc>
+            </a:pPr>
+            <a:r>
+              <a:rPr sz="1100" b="1">
+                <a:solidFill>
+                  <a:srgbClr val="0B1D3A"/>
+                </a:solidFill>
+                <a:latin typeface="PingFang SC"/>
+              </a:rPr>
+              <a:t>列表页:状态/进度/耗时/租户</a:t>
+            </a:r>
+          </a:p>
+        </p:txBody>
+      </p:sp>
+      <p:cxnSp>
+        <p:nvCxnSpPr>
+          <p:cNvPr id="10" name="Connector 9"/>
+          <p:cNvCxnSpPr/>
+          <p:nvPr/>
+        </p:nvCxnSpPr>
+        <p:spPr>
+          <a:xfrm>
+            <a:off x="6096000" y="2033587"/>
+            <a:ext cx="0" cy="152400"/>
+          </a:xfrm>
+          <a:prstGeom prst="line">
+            <a:avLst/>
+          </a:prstGeom>
+          <a:ln w="17780">
+            <a:solidFill>
+              <a:srgbClr val="475569"/>
+            </a:solidFill>
+          </a:ln>
+        </p:spPr>
+        <p:style>
+          <a:lnRef idx="2">
+            <a:schemeClr val="accent1"/>
+          </a:lnRef>
+          <a:fillRef idx="0">
+            <a:schemeClr val="accent1"/>
+          </a:fillRef>
+          <a:effectRef idx="1">
+            <a:schemeClr val="accent1"/>
+          </a:effectRef>
+          <a:fontRef idx="minor">
+            <a:schemeClr val="tx1"/>
+          </a:fontRef>
+        </p:style>
+      </p:cxnSp>
+      <p:sp>
+        <p:nvSpPr>
+          <p:cNvPr id="11" name="Isosceles Triangle 10"/>
+          <p:cNvSpPr/>
+          <p:nvPr/>
+        </p:nvSpPr>
+        <p:spPr>
+          <a:xfrm rot="10800000">
+            <a:off x="6053138" y="2100263"/>
+            <a:ext cx="85725" cy="85725"/>
+          </a:xfrm>
+          <a:prstGeom prst="triangle">
+            <a:avLst/>
+          </a:prstGeom>
+          <a:solidFill>
+            <a:srgbClr val="475569"/>
+          </a:solidFill>
+          <a:ln>
+            <a:noFill/>
+          </a:ln>
+          <a:effectLst/>
+        </p:spPr>
+        <p:style>
+          <a:lnRef idx="1">
+            <a:schemeClr val="accent1"/>
+          </a:lnRef>
+          <a:fillRef idx="3">
+            <a:schemeClr val="accent1"/>
+          </a:fillRef>
+          <a:effectRef idx="2">
+            <a:schemeClr val="accent1"/>
+          </a:effectRef>
+          <a:fontRef idx="minor">
+            <a:schemeClr val="lt1"/>
+          </a:fontRef>
+        </p:style>
+        <p:txBody>
+          <a:bodyPr rtlCol="0" anchor="ctr"/>
+          <a:lstStyle/>
+          <a:p>
+            <a:pPr algn="ctr"/>
+          </a:p>
+        </p:txBody>
+      </p:sp>
+      <p:sp>
+        <p:nvSpPr>
+          <p:cNvPr id="12" name="Rounded Rectangle 11"/>
+          <p:cNvSpPr/>
+          <p:nvPr/>
+        </p:nvSpPr>
+        <p:spPr>
+          <a:xfrm>
+            <a:off x="5743575" y="2014537"/>
+            <a:ext cx="704850" cy="171450"/>
+          </a:xfrm>
+          <a:prstGeom prst="roundRect">
+            <a:avLst>
+              <a:gd name="adj" fmla="val 8000"/>
+            </a:avLst>
+          </a:prstGeom>
+          <a:solidFill>
+            <a:srgbClr val="FFFFFF"/>
+          </a:solidFill>
+          <a:ln w="12700">
+            <a:solidFill>
+              <a:srgbClr val="DDE5EE"/>
+            </a:solidFill>
+          </a:ln>
+          <a:effectLst/>
+        </p:spPr>
+        <p:style>
+          <a:lnRef idx="1">
+            <a:schemeClr val="accent1"/>
+          </a:lnRef>
+          <a:fillRef idx="3">
+            <a:schemeClr val="accent1"/>
+          </a:fillRef>
+          <a:effectRef idx="2">
+            <a:schemeClr val="accent1"/>
+          </a:effectRef>
+          <a:fontRef idx="minor">
+            <a:schemeClr val="lt1"/>
+          </a:fontRef>
+        </p:style>
+        <p:txBody>
+          <a:bodyPr rtlCol="0" anchor="ctr"/>
+          <a:lstStyle/>
+          <a:p>
+            <a:pPr algn="ctr"/>
+          </a:p>
+        </p:txBody>
+      </p:sp>
+      <p:sp>
+        <p:nvSpPr>
+          <p:cNvPr id="13" name="TextBox 12"/>
+          <p:cNvSpPr txBox="1"/>
+          <p:nvPr/>
+        </p:nvSpPr>
+        <p:spPr>
+          <a:xfrm>
+            <a:off x="5743575" y="2014537"/>
+            <a:ext cx="704850" cy="171450"/>
+          </a:xfrm>
+          <a:prstGeom prst="rect">
+            <a:avLst/>
+          </a:prstGeom>
+          <a:noFill/>
+        </p:spPr>
+        <p:txBody>
+          <a:bodyPr wrap="square" anchor="ctr">
+            <a:spAutoFit/>
+          </a:bodyPr>
+          <a:lstStyle/>
+          <a:p>
+            <a:pPr algn="ctr">
+              <a:lnSpc>
+                <a:spcPct val="100000"/>
+              </a:lnSpc>
+            </a:pPr>
+            <a:r>
+              <a:rPr sz="1100" b="1">
+                <a:solidFill>
+                  <a:srgbClr val="0B1D3A"/>
+                </a:solidFill>
+                <a:latin typeface="PingFang SC"/>
+              </a:rPr>
+              <a:t>查询</a:t>
+            </a:r>
+          </a:p>
+        </p:txBody>
+      </p:sp>
+      <p:sp>
+        <p:nvSpPr>
+          <p:cNvPr id="14" name="Rounded Rectangle 13"/>
+          <p:cNvSpPr/>
+          <p:nvPr/>
+        </p:nvSpPr>
+        <p:spPr>
+          <a:xfrm>
+            <a:off x="1847850" y="2185987"/>
+            <a:ext cx="8877300" cy="1100137"/>
+          </a:xfrm>
+          <a:prstGeom prst="roundRect">
+            <a:avLst>
+              <a:gd name="adj" fmla="val 8000"/>
+            </a:avLst>
+          </a:prstGeom>
+          <a:solidFill>
+            <a:srgbClr val="F1F5F9"/>
+          </a:solidFill>
+          <a:ln>
+            <a:noFill/>
+          </a:ln>
+          <a:effectLst/>
+        </p:spPr>
+        <p:style>
+          <a:lnRef idx="1">
+            <a:schemeClr val="accent1"/>
+          </a:lnRef>
+          <a:fillRef idx="3">
+            <a:schemeClr val="accent1"/>
+          </a:fillRef>
+          <a:effectRef idx="2">
+            <a:schemeClr val="accent1"/>
+          </a:effectRef>
+          <a:fontRef idx="minor">
+            <a:schemeClr val="lt1"/>
+          </a:fontRef>
+        </p:style>
+        <p:txBody>
+          <a:bodyPr rtlCol="0" anchor="ctr"/>
+          <a:lstStyle/>
+          <a:p>
+            <a:pPr algn="ctr"/>
+          </a:p>
+        </p:txBody>
+      </p:sp>
+      <p:sp>
+        <p:nvSpPr>
+          <p:cNvPr id="15" name="TextBox 14"/>
+          <p:cNvSpPr txBox="1"/>
+          <p:nvPr/>
+        </p:nvSpPr>
+        <p:spPr>
+          <a:xfrm>
+            <a:off x="1962150" y="1957387"/>
+            <a:ext cx="1905000" cy="209550"/>
+          </a:xfrm>
+          <a:prstGeom prst="rect">
+            <a:avLst/>
+          </a:prstGeom>
+          <a:noFill/>
+        </p:spPr>
+        <p:txBody>
+          <a:bodyPr wrap="square" anchor="ctr">
+            <a:spAutoFit/>
+          </a:bodyPr>
+          <a:lstStyle/>
+          <a:p>
+            <a:pPr algn="l">
+              <a:lnSpc>
+                <a:spcPct val="100000"/>
+              </a:lnSpc>
+            </a:pPr>
+            <a:r>
+              <a:rPr sz="1100" b="1">
+                <a:solidFill>
+                  <a:srgbClr val="14B8A6"/>
+                </a:solidFill>
+                <a:latin typeface="PingFang SC"/>
+              </a:rPr>
+              <a:t>L2</a:t>
+            </a:r>
+          </a:p>
+        </p:txBody>
+      </p:sp>
+      <p:sp>
+        <p:nvSpPr>
+          <p:cNvPr id="16" name="Rounded Rectangle 15"/>
+          <p:cNvSpPr/>
+          <p:nvPr/>
+        </p:nvSpPr>
+        <p:spPr>
+          <a:xfrm>
+            <a:off x="1905000" y="2224087"/>
+            <a:ext cx="8763000" cy="1023937"/>
+          </a:xfrm>
+          <a:prstGeom prst="roundRect">
+            <a:avLst>
+              <a:gd name="adj" fmla="val 8000"/>
+            </a:avLst>
+          </a:prstGeom>
+          <a:solidFill>
+            <a:srgbClr val="FFFFFF"/>
+          </a:solidFill>
+          <a:ln w="12700">
+            <a:solidFill>
+              <a:srgbClr val="14B8A6"/>
+            </a:solidFill>
+          </a:ln>
+          <a:effectLst/>
+        </p:spPr>
+        <p:style>
+          <a:lnRef idx="1">
+            <a:schemeClr val="accent1"/>
+          </a:lnRef>
+          <a:fillRef idx="3">
+            <a:schemeClr val="accent1"/>
+          </a:fillRef>
+          <a:effectRef idx="2">
+            <a:schemeClr val="accent1"/>
+          </a:effectRef>
+          <a:fontRef idx="minor">
+            <a:schemeClr val="lt1"/>
+          </a:fontRef>
+        </p:style>
+        <p:txBody>
+          <a:bodyPr rtlCol="0" anchor="ctr"/>
+          <a:lstStyle/>
+          <a:p>
+            <a:pPr algn="ctr"/>
+          </a:p>
+        </p:txBody>
+      </p:sp>
+      <p:sp>
+        <p:nvSpPr>
+          <p:cNvPr id="17" name="Rectangle 16"/>
+          <p:cNvSpPr/>
+          <p:nvPr/>
+        </p:nvSpPr>
+        <p:spPr>
+          <a:xfrm>
+            <a:off x="1905000" y="2224087"/>
+            <a:ext cx="47625" cy="1023937"/>
+          </a:xfrm>
+          <a:prstGeom prst="rect">
+            <a:avLst/>
+          </a:prstGeom>
+          <a:solidFill>
+            <a:srgbClr val="14B8A6"/>
+          </a:solidFill>
+          <a:ln>
+            <a:noFill/>
+          </a:ln>
+          <a:effectLst/>
+        </p:spPr>
+        <p:style>
+          <a:lnRef idx="1">
+            <a:schemeClr val="accent1"/>
+          </a:lnRef>
+          <a:fillRef idx="3">
+            <a:schemeClr val="accent1"/>
+          </a:fillRef>
+          <a:effectRef idx="2">
+            <a:schemeClr val="accent1"/>
+          </a:effectRef>
+          <a:fontRef idx="minor">
+            <a:schemeClr val="lt1"/>
+          </a:fontRef>
+        </p:style>
+        <p:txBody>
+          <a:bodyPr rtlCol="0" anchor="ctr"/>
+          <a:lstStyle/>
+          <a:p>
+            <a:pPr algn="ctr"/>
+          </a:p>
+        </p:txBody>
+      </p:sp>
+      <p:sp>
+        <p:nvSpPr>
+          <p:cNvPr id="18" name="TextBox 17"/>
+          <p:cNvSpPr txBox="1"/>
+          <p:nvPr/>
+        </p:nvSpPr>
+        <p:spPr>
+          <a:xfrm>
+            <a:off x="2057400" y="2224087"/>
+            <a:ext cx="8496300" cy="1023937"/>
+          </a:xfrm>
+          <a:prstGeom prst="rect">
+            <a:avLst/>
+          </a:prstGeom>
+          <a:noFill/>
+        </p:spPr>
+        <p:txBody>
+          <a:bodyPr wrap="none" anchor="ctr">
+            <a:spAutoFit/>
+          </a:bodyPr>
+          <a:lstStyle/>
+          <a:p>
+            <a:pPr algn="l">
+              <a:lnSpc>
+                <a:spcPct val="115000"/>
+              </a:lnSpc>
+            </a:pPr>
+            <a:r>
+              <a:rPr sz="1100" b="1">
+                <a:solidFill>
+                  <a:srgbClr val="0B1D3A"/>
+                </a:solidFill>
+                <a:latin typeface="PingFang SC"/>
+              </a:rPr>
+              <a:t>详情页:步骤时间线+观察流</a:t>
+            </a:r>
+          </a:p>
+        </p:txBody>
+      </p:sp>
+      <p:cxnSp>
+        <p:nvCxnSpPr>
+          <p:cNvPr id="19" name="Connector 18"/>
+          <p:cNvCxnSpPr/>
+          <p:nvPr/>
+        </p:nvCxnSpPr>
+        <p:spPr>
+          <a:xfrm>
+            <a:off x="6096000" y="3305174"/>
+            <a:ext cx="0" cy="152400"/>
+          </a:xfrm>
+          <a:prstGeom prst="line">
+            <a:avLst/>
+          </a:prstGeom>
+          <a:ln w="17780">
+            <a:solidFill>
+              <a:srgbClr val="475569"/>
+            </a:solidFill>
+          </a:ln>
+        </p:spPr>
+        <p:style>
+          <a:lnRef idx="2">
+            <a:schemeClr val="accent1"/>
+          </a:lnRef>
+          <a:fillRef idx="0">
+            <a:schemeClr val="accent1"/>
+          </a:fillRef>
+          <a:effectRef idx="1">
+            <a:schemeClr val="accent1"/>
+          </a:effectRef>
+          <a:fontRef idx="minor">
+            <a:schemeClr val="tx1"/>
+          </a:fontRef>
+        </p:style>
+      </p:cxnSp>
+      <p:sp>
+        <p:nvSpPr>
+          <p:cNvPr id="20" name="Isosceles Triangle 19"/>
+          <p:cNvSpPr/>
+          <p:nvPr/>
+        </p:nvSpPr>
+        <p:spPr>
+          <a:xfrm rot="10800000">
+            <a:off x="6053138" y="3371850"/>
+            <a:ext cx="85725" cy="85725"/>
+          </a:xfrm>
+          <a:prstGeom prst="triangle">
+            <a:avLst/>
+          </a:prstGeom>
+          <a:solidFill>
+            <a:srgbClr val="475569"/>
+          </a:solidFill>
+          <a:ln>
+            <a:noFill/>
+          </a:ln>
+          <a:effectLst/>
+        </p:spPr>
+        <p:style>
+          <a:lnRef idx="1">
+            <a:schemeClr val="accent1"/>
+          </a:lnRef>
+          <a:fillRef idx="3">
+            <a:schemeClr val="accent1"/>
+          </a:fillRef>
+          <a:effectRef idx="2">
+            <a:schemeClr val="accent1"/>
+          </a:effectRef>
+          <a:fontRef idx="minor">
+            <a:schemeClr val="lt1"/>
+          </a:fontRef>
+        </p:style>
+        <p:txBody>
+          <a:bodyPr rtlCol="0" anchor="ctr"/>
+          <a:lstStyle/>
+          <a:p>
+            <a:pPr algn="ctr"/>
+          </a:p>
+        </p:txBody>
+      </p:sp>
+      <p:sp>
+        <p:nvSpPr>
+          <p:cNvPr id="21" name="Rounded Rectangle 20"/>
+          <p:cNvSpPr/>
+          <p:nvPr/>
+        </p:nvSpPr>
+        <p:spPr>
+          <a:xfrm>
+            <a:off x="5743575" y="3286124"/>
+            <a:ext cx="704850" cy="171450"/>
+          </a:xfrm>
+          <a:prstGeom prst="roundRect">
+            <a:avLst>
+              <a:gd name="adj" fmla="val 8000"/>
+            </a:avLst>
+          </a:prstGeom>
+          <a:solidFill>
+            <a:srgbClr val="FFFFFF"/>
+          </a:solidFill>
+          <a:ln w="12700">
+            <a:solidFill>
+              <a:srgbClr val="DDE5EE"/>
+            </a:solidFill>
+          </a:ln>
+          <a:effectLst/>
+        </p:spPr>
+        <p:style>
+          <a:lnRef idx="1">
+            <a:schemeClr val="accent1"/>
+          </a:lnRef>
+          <a:fillRef idx="3">
+            <a:schemeClr val="accent1"/>
+          </a:fillRef>
+          <a:effectRef idx="2">
+            <a:schemeClr val="accent1"/>
+          </a:effectRef>
+          <a:fontRef idx="minor">
+            <a:schemeClr val="lt1"/>
+          </a:fontRef>
+        </p:style>
+        <p:txBody>
+          <a:bodyPr rtlCol="0" anchor="ctr"/>
+          <a:lstStyle/>
+          <a:p>
+            <a:pPr algn="ctr"/>
+          </a:p>
+        </p:txBody>
+      </p:sp>
+      <p:sp>
+        <p:nvSpPr>
+          <p:cNvPr id="22" name="TextBox 21"/>
+          <p:cNvSpPr txBox="1"/>
+          <p:nvPr/>
+        </p:nvSpPr>
+        <p:spPr>
+          <a:xfrm>
+            <a:off x="5743575" y="3286124"/>
+            <a:ext cx="704850" cy="171450"/>
+          </a:xfrm>
+          <a:prstGeom prst="rect">
+            <a:avLst/>
+          </a:prstGeom>
+          <a:noFill/>
+        </p:spPr>
+        <p:txBody>
+          <a:bodyPr wrap="square" anchor="ctr">
+            <a:spAutoFit/>
+          </a:bodyPr>
+          <a:lstStyle/>
+          <a:p>
+            <a:pPr algn="ctr">
+              <a:lnSpc>
+                <a:spcPct val="100000"/>
+              </a:lnSpc>
+            </a:pPr>
+            <a:r>
+              <a:rPr sz="1100" b="1">
+                <a:solidFill>
+                  <a:srgbClr val="0B1D3A"/>
+                </a:solidFill>
+                <a:latin typeface="PingFang SC"/>
+              </a:rPr>
+              <a:t>下钻</a:t>
+            </a:r>
+          </a:p>
+        </p:txBody>
+      </p:sp>
+      <p:sp>
+        <p:nvSpPr>
+          <p:cNvPr id="23" name="Rounded Rectangle 22"/>
+          <p:cNvSpPr/>
+          <p:nvPr/>
+        </p:nvSpPr>
+        <p:spPr>
+          <a:xfrm>
+            <a:off x="1847850" y="3457574"/>
+            <a:ext cx="8877300" cy="1100137"/>
+          </a:xfrm>
+          <a:prstGeom prst="roundRect">
+            <a:avLst>
+              <a:gd name="adj" fmla="val 8000"/>
+            </a:avLst>
+          </a:prstGeom>
+          <a:solidFill>
+            <a:srgbClr val="F1F5F9"/>
+          </a:solidFill>
+          <a:ln>
+            <a:noFill/>
+          </a:ln>
+          <a:effectLst/>
+        </p:spPr>
+        <p:style>
+          <a:lnRef idx="1">
+            <a:schemeClr val="accent1"/>
+          </a:lnRef>
+          <a:fillRef idx="3">
+            <a:schemeClr val="accent1"/>
+          </a:fillRef>
+          <a:effectRef idx="2">
+            <a:schemeClr val="accent1"/>
+          </a:effectRef>
+          <a:fontRef idx="minor">
+            <a:schemeClr val="lt1"/>
+          </a:fontRef>
+        </p:style>
+        <p:txBody>
+          <a:bodyPr rtlCol="0" anchor="ctr"/>
+          <a:lstStyle/>
+          <a:p>
+            <a:pPr algn="ctr"/>
+          </a:p>
+        </p:txBody>
+      </p:sp>
+      <p:sp>
+        <p:nvSpPr>
+          <p:cNvPr id="24" name="TextBox 23"/>
+          <p:cNvSpPr txBox="1"/>
+          <p:nvPr/>
+        </p:nvSpPr>
+        <p:spPr>
+          <a:xfrm>
+            <a:off x="1962150" y="3228974"/>
+            <a:ext cx="1905000" cy="209550"/>
+          </a:xfrm>
+          <a:prstGeom prst="rect">
+            <a:avLst/>
+          </a:prstGeom>
+          <a:noFill/>
+        </p:spPr>
+        <p:txBody>
+          <a:bodyPr wrap="square" anchor="ctr">
+            <a:spAutoFit/>
+          </a:bodyPr>
+          <a:lstStyle/>
+          <a:p>
+            <a:pPr algn="l">
+              <a:lnSpc>
+                <a:spcPct val="100000"/>
+              </a:lnSpc>
+            </a:pPr>
+            <a:r>
+              <a:rPr sz="1100" b="1">
+                <a:solidFill>
+                  <a:srgbClr val="8B5CF6"/>
+                </a:solidFill>
+                <a:latin typeface="PingFang SC"/>
+              </a:rPr>
+              <a:t>L3</a:t>
+            </a:r>
+          </a:p>
+        </p:txBody>
+      </p:sp>
+      <p:sp>
+        <p:nvSpPr>
+          <p:cNvPr id="25" name="Rounded Rectangle 24"/>
+          <p:cNvSpPr/>
+          <p:nvPr/>
+        </p:nvSpPr>
+        <p:spPr>
+          <a:xfrm>
+            <a:off x="1905000" y="3495674"/>
+            <a:ext cx="8763000" cy="1023937"/>
+          </a:xfrm>
+          <a:prstGeom prst="roundRect">
+            <a:avLst>
+              <a:gd name="adj" fmla="val 8000"/>
+            </a:avLst>
+          </a:prstGeom>
+          <a:solidFill>
+            <a:srgbClr val="FFFFFF"/>
+          </a:solidFill>
+          <a:ln w="12700">
+            <a:solidFill>
+              <a:srgbClr val="8B5CF6"/>
+            </a:solidFill>
+          </a:ln>
+          <a:effectLst/>
+        </p:spPr>
+        <p:style>
+          <a:lnRef idx="1">
+            <a:schemeClr val="accent1"/>
+          </a:lnRef>
+          <a:fillRef idx="3">
+            <a:schemeClr val="accent1"/>
+          </a:fillRef>
+          <a:effectRef idx="2">
+            <a:schemeClr val="accent1"/>
+          </a:effectRef>
+          <a:fontRef idx="minor">
+            <a:schemeClr val="lt1"/>
+          </a:fontRef>
+        </p:style>
+        <p:txBody>
+          <a:bodyPr rtlCol="0" anchor="ctr"/>
+          <a:lstStyle/>
+          <a:p>
+            <a:pPr algn="ctr"/>
+          </a:p>
+        </p:txBody>
+      </p:sp>
+      <p:sp>
+        <p:nvSpPr>
+          <p:cNvPr id="26" name="Rectangle 25"/>
+          <p:cNvSpPr/>
+          <p:nvPr/>
+        </p:nvSpPr>
+        <p:spPr>
+          <a:xfrm>
+            <a:off x="1905000" y="3495674"/>
+            <a:ext cx="47625" cy="1023937"/>
+          </a:xfrm>
+          <a:prstGeom prst="rect">
+            <a:avLst/>
+          </a:prstGeom>
+          <a:solidFill>
+            <a:srgbClr val="8B5CF6"/>
+          </a:solidFill>
+          <a:ln>
+            <a:noFill/>
+          </a:ln>
+          <a:effectLst/>
+        </p:spPr>
+        <p:style>
+          <a:lnRef idx="1">
+            <a:schemeClr val="accent1"/>
+          </a:lnRef>
+          <a:fillRef idx="3">
+            <a:schemeClr val="accent1"/>
+          </a:fillRef>
+          <a:effectRef idx="2">
+            <a:schemeClr val="accent1"/>
+          </a:effectRef>
+          <a:fontRef idx="minor">
+            <a:schemeClr val="lt1"/>
+          </a:fontRef>
+        </p:style>
+        <p:txBody>
+          <a:bodyPr rtlCol="0" anchor="ctr"/>
+          <a:lstStyle/>
+          <a:p>
+            <a:pPr algn="ctr"/>
+          </a:p>
+        </p:txBody>
+      </p:sp>
+      <p:sp>
+        <p:nvSpPr>
+          <p:cNvPr id="27" name="TextBox 26"/>
+          <p:cNvSpPr txBox="1"/>
+          <p:nvPr/>
+        </p:nvSpPr>
+        <p:spPr>
+          <a:xfrm>
+            <a:off x="2057400" y="3495674"/>
+            <a:ext cx="8496300" cy="1023937"/>
+          </a:xfrm>
+          <a:prstGeom prst="rect">
+            <a:avLst/>
+          </a:prstGeom>
+          <a:noFill/>
+        </p:spPr>
+        <p:txBody>
+          <a:bodyPr wrap="none" anchor="ctr">
+            <a:spAutoFit/>
+          </a:bodyPr>
+          <a:lstStyle/>
+          <a:p>
+            <a:pPr algn="l">
+              <a:lnSpc>
+                <a:spcPct val="115000"/>
+              </a:lnSpc>
+            </a:pPr>
+            <a:r>
+              <a:rPr sz="1100" b="1">
+                <a:solidFill>
+                  <a:srgbClr val="0B1D3A"/>
+                </a:solidFill>
+                <a:latin typeface="PingFang SC"/>
+              </a:rPr>
+              <a:t>操作区:取消/接管/重试/确认</a:t>
+            </a:r>
+          </a:p>
+        </p:txBody>
+      </p:sp>
+      <p:cxnSp>
+        <p:nvCxnSpPr>
+          <p:cNvPr id="28" name="Connector 27"/>
+          <p:cNvCxnSpPr/>
+          <p:nvPr/>
+        </p:nvCxnSpPr>
+        <p:spPr>
+          <a:xfrm>
+            <a:off x="6096000" y="4576761"/>
+            <a:ext cx="0" cy="152400"/>
+          </a:xfrm>
+          <a:prstGeom prst="line">
+            <a:avLst/>
+          </a:prstGeom>
+          <a:ln w="17780">
+            <a:solidFill>
+              <a:srgbClr val="475569"/>
+            </a:solidFill>
+          </a:ln>
+        </p:spPr>
+        <p:style>
+          <a:lnRef idx="2">
+            <a:schemeClr val="accent1"/>
+          </a:lnRef>
+          <a:fillRef idx="0">
+            <a:schemeClr val="accent1"/>
+          </a:fillRef>
+          <a:effectRef idx="1">
+            <a:schemeClr val="accent1"/>
+          </a:effectRef>
+          <a:fontRef idx="minor">
+            <a:schemeClr val="tx1"/>
+          </a:fontRef>
+        </p:style>
+      </p:cxnSp>
+      <p:sp>
+        <p:nvSpPr>
+          <p:cNvPr id="29" name="Isosceles Triangle 28"/>
+          <p:cNvSpPr/>
+          <p:nvPr/>
+        </p:nvSpPr>
+        <p:spPr>
+          <a:xfrm rot="10800000">
+            <a:off x="6053138" y="4643437"/>
+            <a:ext cx="85725" cy="85725"/>
+          </a:xfrm>
+          <a:prstGeom prst="triangle">
+            <a:avLst/>
+          </a:prstGeom>
+          <a:solidFill>
+            <a:srgbClr val="475569"/>
+          </a:solidFill>
+          <a:ln>
+            <a:noFill/>
+          </a:ln>
+          <a:effectLst/>
+        </p:spPr>
+        <p:style>
+          <a:lnRef idx="1">
+            <a:schemeClr val="accent1"/>
+          </a:lnRef>
+          <a:fillRef idx="3">
+            <a:schemeClr val="accent1"/>
+          </a:fillRef>
+          <a:effectRef idx="2">
+            <a:schemeClr val="accent1"/>
+          </a:effectRef>
+          <a:fontRef idx="minor">
+            <a:schemeClr val="lt1"/>
+          </a:fontRef>
+        </p:style>
+        <p:txBody>
+          <a:bodyPr rtlCol="0" anchor="ctr"/>
+          <a:lstStyle/>
+          <a:p>
+            <a:pPr algn="ctr"/>
+          </a:p>
+        </p:txBody>
+      </p:sp>
+      <p:sp>
+        <p:nvSpPr>
+          <p:cNvPr id="30" name="Rounded Rectangle 29"/>
+          <p:cNvSpPr/>
+          <p:nvPr/>
+        </p:nvSpPr>
+        <p:spPr>
+          <a:xfrm>
+            <a:off x="5743575" y="4557711"/>
+            <a:ext cx="704850" cy="171450"/>
+          </a:xfrm>
+          <a:prstGeom prst="roundRect">
+            <a:avLst>
+              <a:gd name="adj" fmla="val 8000"/>
+            </a:avLst>
+          </a:prstGeom>
+          <a:solidFill>
+            <a:srgbClr val="FFFFFF"/>
+          </a:solidFill>
+          <a:ln w="12700">
+            <a:solidFill>
+              <a:srgbClr val="DDE5EE"/>
+            </a:solidFill>
+          </a:ln>
+          <a:effectLst/>
+        </p:spPr>
+        <p:style>
+          <a:lnRef idx="1">
+            <a:schemeClr val="accent1"/>
+          </a:lnRef>
+          <a:fillRef idx="3">
+            <a:schemeClr val="accent1"/>
+          </a:fillRef>
+          <a:effectRef idx="2">
+            <a:schemeClr val="accent1"/>
+          </a:effectRef>
+          <a:fontRef idx="minor">
+            <a:schemeClr val="lt1"/>
+          </a:fontRef>
+        </p:style>
+        <p:txBody>
+          <a:bodyPr rtlCol="0" anchor="ctr"/>
+          <a:lstStyle/>
+          <a:p>
+            <a:pPr algn="ctr"/>
+          </a:p>
+        </p:txBody>
+      </p:sp>
+      <p:sp>
+        <p:nvSpPr>
+          <p:cNvPr id="31" name="TextBox 30"/>
+          <p:cNvSpPr txBox="1"/>
+          <p:nvPr/>
+        </p:nvSpPr>
+        <p:spPr>
+          <a:xfrm>
+            <a:off x="5743575" y="4557711"/>
+            <a:ext cx="704850" cy="171450"/>
+          </a:xfrm>
+          <a:prstGeom prst="rect">
+            <a:avLst/>
+          </a:prstGeom>
+          <a:noFill/>
+        </p:spPr>
+        <p:txBody>
+          <a:bodyPr wrap="square" anchor="ctr">
+            <a:spAutoFit/>
+          </a:bodyPr>
+          <a:lstStyle/>
+          <a:p>
+            <a:pPr algn="ctr">
+              <a:lnSpc>
+                <a:spcPct val="100000"/>
+              </a:lnSpc>
+            </a:pPr>
+            <a:r>
+              <a:rPr sz="1100" b="1">
+                <a:solidFill>
+                  <a:srgbClr val="0B1D3A"/>
+                </a:solidFill>
+                <a:latin typeface="PingFang SC"/>
+              </a:rPr>
+              <a:t>操作</a:t>
+            </a:r>
+          </a:p>
+        </p:txBody>
+      </p:sp>
+      <p:sp>
+        <p:nvSpPr>
+          <p:cNvPr id="32" name="Rounded Rectangle 31"/>
+          <p:cNvSpPr/>
+          <p:nvPr/>
+        </p:nvSpPr>
+        <p:spPr>
+          <a:xfrm>
+            <a:off x="1847850" y="4729161"/>
+            <a:ext cx="8877300" cy="1100137"/>
+          </a:xfrm>
+          <a:prstGeom prst="roundRect">
+            <a:avLst>
+              <a:gd name="adj" fmla="val 8000"/>
+            </a:avLst>
+          </a:prstGeom>
+          <a:solidFill>
+            <a:srgbClr val="F1F5F9"/>
+          </a:solidFill>
+          <a:ln>
+            <a:noFill/>
+          </a:ln>
+          <a:effectLst/>
+        </p:spPr>
+        <p:style>
+          <a:lnRef idx="1">
+            <a:schemeClr val="accent1"/>
+          </a:lnRef>
+          <a:fillRef idx="3">
+            <a:schemeClr val="accent1"/>
+          </a:fillRef>
+          <a:effectRef idx="2">
+            <a:schemeClr val="accent1"/>
+          </a:effectRef>
+          <a:fontRef idx="minor">
+            <a:schemeClr val="lt1"/>
+          </a:fontRef>
+        </p:style>
+        <p:txBody>
+          <a:bodyPr rtlCol="0" anchor="ctr"/>
+          <a:lstStyle/>
+          <a:p>
+            <a:pPr algn="ctr"/>
+          </a:p>
+        </p:txBody>
+      </p:sp>
+      <p:sp>
+        <p:nvSpPr>
+          <p:cNvPr id="33" name="TextBox 32"/>
+          <p:cNvSpPr txBox="1"/>
+          <p:nvPr/>
+        </p:nvSpPr>
+        <p:spPr>
+          <a:xfrm>
+            <a:off x="1962150" y="4500561"/>
+            <a:ext cx="1905000" cy="209550"/>
+          </a:xfrm>
+          <a:prstGeom prst="rect">
+            <a:avLst/>
+          </a:prstGeom>
+          <a:noFill/>
+        </p:spPr>
+        <p:txBody>
+          <a:bodyPr wrap="square" anchor="ctr">
+            <a:spAutoFit/>
+          </a:bodyPr>
+          <a:lstStyle/>
+          <a:p>
+            <a:pPr algn="l">
+              <a:lnSpc>
+                <a:spcPct val="100000"/>
+              </a:lnSpc>
+            </a:pPr>
+            <a:r>
+              <a:rPr sz="1100" b="1">
+                <a:solidFill>
+                  <a:srgbClr val="F59E0B"/>
+                </a:solidFill>
+                <a:latin typeface="PingFang SC"/>
+              </a:rPr>
+              <a:t>L4</a:t>
+            </a:r>
+          </a:p>
+        </p:txBody>
+      </p:sp>
+      <p:sp>
+        <p:nvSpPr>
+          <p:cNvPr id="34" name="Rounded Rectangle 33"/>
+          <p:cNvSpPr/>
+          <p:nvPr/>
+        </p:nvSpPr>
+        <p:spPr>
+          <a:xfrm>
+            <a:off x="1905000" y="4767261"/>
+            <a:ext cx="8763000" cy="1023937"/>
+          </a:xfrm>
+          <a:prstGeom prst="roundRect">
+            <a:avLst>
+              <a:gd name="adj" fmla="val 8000"/>
+            </a:avLst>
+          </a:prstGeom>
+          <a:solidFill>
+            <a:srgbClr val="FFFFFF"/>
+          </a:solidFill>
+          <a:ln w="12700">
+            <a:solidFill>
+              <a:srgbClr val="F59E0B"/>
+            </a:solidFill>
+          </a:ln>
+          <a:effectLst/>
+        </p:spPr>
+        <p:style>
+          <a:lnRef idx="1">
+            <a:schemeClr val="accent1"/>
+          </a:lnRef>
+          <a:fillRef idx="3">
+            <a:schemeClr val="accent1"/>
+          </a:fillRef>
+          <a:effectRef idx="2">
+            <a:schemeClr val="accent1"/>
+          </a:effectRef>
+          <a:fontRef idx="minor">
+            <a:schemeClr val="lt1"/>
+          </a:fontRef>
+        </p:style>
+        <p:txBody>
+          <a:bodyPr rtlCol="0" anchor="ctr"/>
+          <a:lstStyle/>
+          <a:p>
+            <a:pPr algn="ctr"/>
+          </a:p>
+        </p:txBody>
+      </p:sp>
+      <p:sp>
+        <p:nvSpPr>
+          <p:cNvPr id="35" name="Rectangle 34"/>
+          <p:cNvSpPr/>
+          <p:nvPr/>
+        </p:nvSpPr>
+        <p:spPr>
+          <a:xfrm>
+            <a:off x="1905000" y="4767261"/>
+            <a:ext cx="47625" cy="1023937"/>
+          </a:xfrm>
+          <a:prstGeom prst="rect">
+            <a:avLst/>
+          </a:prstGeom>
+          <a:solidFill>
+            <a:srgbClr val="F59E0B"/>
+          </a:solidFill>
+          <a:ln>
+            <a:noFill/>
+          </a:ln>
+          <a:effectLst/>
+        </p:spPr>
+        <p:style>
+          <a:lnRef idx="1">
+            <a:schemeClr val="accent1"/>
+          </a:lnRef>
+          <a:fillRef idx="3">
+            <a:schemeClr val="accent1"/>
+          </a:fillRef>
+          <a:effectRef idx="2">
+            <a:schemeClr val="accent1"/>
+          </a:effectRef>
+          <a:fontRef idx="minor">
+            <a:schemeClr val="lt1"/>
+          </a:fontRef>
+        </p:style>
+        <p:txBody>
+          <a:bodyPr rtlCol="0" anchor="ctr"/>
+          <a:lstStyle/>
+          <a:p>
+            <a:pPr algn="ctr"/>
+          </a:p>
+        </p:txBody>
+      </p:sp>
+      <p:sp>
+        <p:nvSpPr>
+          <p:cNvPr id="36" name="TextBox 35"/>
+          <p:cNvSpPr txBox="1"/>
+          <p:nvPr/>
+        </p:nvSpPr>
+        <p:spPr>
+          <a:xfrm>
+            <a:off x="2057400" y="4767261"/>
+            <a:ext cx="8496300" cy="1023937"/>
+          </a:xfrm>
+          <a:prstGeom prst="rect">
+            <a:avLst/>
+          </a:prstGeom>
+          <a:noFill/>
+        </p:spPr>
+        <p:txBody>
+          <a:bodyPr wrap="none" anchor="ctr">
+            <a:spAutoFit/>
+          </a:bodyPr>
+          <a:lstStyle/>
+          <a:p>
+            <a:pPr algn="l">
+              <a:lnSpc>
+                <a:spcPct val="115000"/>
+              </a:lnSpc>
+            </a:pPr>
+            <a:r>
+              <a:rPr sz="900" b="1">
+                <a:solidFill>
+                  <a:srgbClr val="0B1D3A"/>
+                </a:solidFill>
+                <a:latin typeface="PingFang SC"/>
+              </a:rPr>
+              <a:t>数据面:GraphQL 查询+Trace</a:t>
+            </a:r>
+          </a:p>
+        </p:txBody>
+      </p:sp>
+      <p:sp>
+        <p:nvSpPr>
+          <p:cNvPr id="37" name="TextBox 36"/>
+          <p:cNvSpPr txBox="1"/>
+          <p:nvPr/>
+        </p:nvSpPr>
+        <p:spPr>
+          <a:xfrm>
+            <a:off x="10287000" y="6534150"/>
+            <a:ext cx="1619250" cy="266700"/>
           </a:xfrm>
           <a:prstGeom prst="rect">
             <a:avLst/>
@@ -14972,1107 +16359,6 @@
               </a:lnSpc>
             </a:pPr>
             <a:r>
-              <a:rPr sz="1100" b="0">
-                <a:solidFill>
-                  <a:srgbClr val="94A3B8"/>
-                </a:solidFill>
-                <a:latin typeface="PingFang SC"/>
-              </a:rPr>
-              <a:t>GraphQL BFF 的典型消费方</a:t>
-            </a:r>
-          </a:p>
-        </p:txBody>
-      </p:sp>
-      <p:sp>
-        <p:nvSpPr>
-          <p:cNvPr id="6" name="Rounded Rectangle 5"/>
-          <p:cNvSpPr/>
-          <p:nvPr/>
-        </p:nvSpPr>
-        <p:spPr>
-          <a:xfrm>
-            <a:off x="1847850" y="914400"/>
-            <a:ext cx="8877300" cy="1100137"/>
-          </a:xfrm>
-          <a:prstGeom prst="roundRect">
-            <a:avLst>
-              <a:gd name="adj" fmla="val 8000"/>
-            </a:avLst>
-          </a:prstGeom>
-          <a:solidFill>
-            <a:srgbClr val="F1F5F9"/>
-          </a:solidFill>
-          <a:ln>
-            <a:noFill/>
-          </a:ln>
-          <a:effectLst/>
-        </p:spPr>
-        <p:style>
-          <a:lnRef idx="1">
-            <a:schemeClr val="accent1"/>
-          </a:lnRef>
-          <a:fillRef idx="3">
-            <a:schemeClr val="accent1"/>
-          </a:fillRef>
-          <a:effectRef idx="2">
-            <a:schemeClr val="accent1"/>
-          </a:effectRef>
-          <a:fontRef idx="minor">
-            <a:schemeClr val="lt1"/>
-          </a:fontRef>
-        </p:style>
-        <p:txBody>
-          <a:bodyPr rtlCol="0" anchor="ctr"/>
-          <a:lstStyle/>
-          <a:p>
-            <a:pPr algn="ctr"/>
-          </a:p>
-        </p:txBody>
-      </p:sp>
-      <p:sp>
-        <p:nvSpPr>
-          <p:cNvPr id="7" name="Rounded Rectangle 6"/>
-          <p:cNvSpPr/>
-          <p:nvPr/>
-        </p:nvSpPr>
-        <p:spPr>
-          <a:xfrm>
-            <a:off x="1905000" y="952500"/>
-            <a:ext cx="8763000" cy="1023937"/>
-          </a:xfrm>
-          <a:prstGeom prst="roundRect">
-            <a:avLst>
-              <a:gd name="adj" fmla="val 8000"/>
-            </a:avLst>
-          </a:prstGeom>
-          <a:solidFill>
-            <a:srgbClr val="FFFFFF"/>
-          </a:solidFill>
-          <a:ln w="12700">
-            <a:solidFill>
-              <a:srgbClr val="2563EB"/>
-            </a:solidFill>
-          </a:ln>
-          <a:effectLst/>
-        </p:spPr>
-        <p:style>
-          <a:lnRef idx="1">
-            <a:schemeClr val="accent1"/>
-          </a:lnRef>
-          <a:fillRef idx="3">
-            <a:schemeClr val="accent1"/>
-          </a:fillRef>
-          <a:effectRef idx="2">
-            <a:schemeClr val="accent1"/>
-          </a:effectRef>
-          <a:fontRef idx="minor">
-            <a:schemeClr val="lt1"/>
-          </a:fontRef>
-        </p:style>
-        <p:txBody>
-          <a:bodyPr rtlCol="0" anchor="ctr"/>
-          <a:lstStyle/>
-          <a:p>
-            <a:pPr algn="ctr"/>
-          </a:p>
-        </p:txBody>
-      </p:sp>
-      <p:sp>
-        <p:nvSpPr>
-          <p:cNvPr id="8" name="Rectangle 7"/>
-          <p:cNvSpPr/>
-          <p:nvPr/>
-        </p:nvSpPr>
-        <p:spPr>
-          <a:xfrm>
-            <a:off x="1905000" y="952500"/>
-            <a:ext cx="47625" cy="1023937"/>
-          </a:xfrm>
-          <a:prstGeom prst="rect">
-            <a:avLst/>
-          </a:prstGeom>
-          <a:solidFill>
-            <a:srgbClr val="2563EB"/>
-          </a:solidFill>
-          <a:ln>
-            <a:noFill/>
-          </a:ln>
-          <a:effectLst/>
-        </p:spPr>
-        <p:style>
-          <a:lnRef idx="1">
-            <a:schemeClr val="accent1"/>
-          </a:lnRef>
-          <a:fillRef idx="3">
-            <a:schemeClr val="accent1"/>
-          </a:fillRef>
-          <a:effectRef idx="2">
-            <a:schemeClr val="accent1"/>
-          </a:effectRef>
-          <a:fontRef idx="minor">
-            <a:schemeClr val="lt1"/>
-          </a:fontRef>
-        </p:style>
-        <p:txBody>
-          <a:bodyPr rtlCol="0" anchor="ctr"/>
-          <a:lstStyle/>
-          <a:p>
-            <a:pPr algn="ctr"/>
-          </a:p>
-        </p:txBody>
-      </p:sp>
-      <p:sp>
-        <p:nvSpPr>
-          <p:cNvPr id="9" name="TextBox 8"/>
-          <p:cNvSpPr txBox="1"/>
-          <p:nvPr/>
-        </p:nvSpPr>
-        <p:spPr>
-          <a:xfrm>
-            <a:off x="2038350" y="952500"/>
-            <a:ext cx="8534400" cy="1023937"/>
-          </a:xfrm>
-          <a:prstGeom prst="rect">
-            <a:avLst/>
-          </a:prstGeom>
-          <a:noFill/>
-        </p:spPr>
-        <p:txBody>
-          <a:bodyPr wrap="square" anchor="ctr">
-            <a:spAutoFit/>
-          </a:bodyPr>
-          <a:lstStyle/>
-          <a:p>
-            <a:pPr algn="l">
-              <a:lnSpc>
-                <a:spcPct val="100000"/>
-              </a:lnSpc>
-            </a:pPr>
-            <a:r>
-              <a:rPr sz="1200" b="1">
-                <a:solidFill>
-                  <a:srgbClr val="475569"/>
-                </a:solidFill>
-                <a:latin typeface="PingFang SC"/>
-              </a:rPr>
-              <a:t>列表页:状态/进度/耗时/租户</a:t>
-            </a:r>
-          </a:p>
-        </p:txBody>
-      </p:sp>
-      <p:cxnSp>
-        <p:nvCxnSpPr>
-          <p:cNvPr id="10" name="Connector 9"/>
-          <p:cNvCxnSpPr/>
-          <p:nvPr/>
-        </p:nvCxnSpPr>
-        <p:spPr>
-          <a:xfrm>
-            <a:off x="6096000" y="2033587"/>
-            <a:ext cx="0" cy="152400"/>
-          </a:xfrm>
-          <a:prstGeom prst="line">
-            <a:avLst/>
-          </a:prstGeom>
-          <a:ln w="15240">
-            <a:solidFill>
-              <a:srgbClr val="94A3B8"/>
-            </a:solidFill>
-          </a:ln>
-        </p:spPr>
-        <p:style>
-          <a:lnRef idx="2">
-            <a:schemeClr val="accent1"/>
-          </a:lnRef>
-          <a:fillRef idx="0">
-            <a:schemeClr val="accent1"/>
-          </a:fillRef>
-          <a:effectRef idx="1">
-            <a:schemeClr val="accent1"/>
-          </a:effectRef>
-          <a:fontRef idx="minor">
-            <a:schemeClr val="tx1"/>
-          </a:fontRef>
-        </p:style>
-      </p:cxnSp>
-      <p:sp>
-        <p:nvSpPr>
-          <p:cNvPr id="11" name="Isosceles Triangle 10"/>
-          <p:cNvSpPr/>
-          <p:nvPr/>
-        </p:nvSpPr>
-        <p:spPr>
-          <a:xfrm rot="10800000">
-            <a:off x="6053138" y="2100263"/>
-            <a:ext cx="85725" cy="85725"/>
-          </a:xfrm>
-          <a:prstGeom prst="triangle">
-            <a:avLst/>
-          </a:prstGeom>
-          <a:solidFill>
-            <a:srgbClr val="94A3B8"/>
-          </a:solidFill>
-          <a:ln>
-            <a:noFill/>
-          </a:ln>
-          <a:effectLst/>
-        </p:spPr>
-        <p:style>
-          <a:lnRef idx="1">
-            <a:schemeClr val="accent1"/>
-          </a:lnRef>
-          <a:fillRef idx="3">
-            <a:schemeClr val="accent1"/>
-          </a:fillRef>
-          <a:effectRef idx="2">
-            <a:schemeClr val="accent1"/>
-          </a:effectRef>
-          <a:fontRef idx="minor">
-            <a:schemeClr val="lt1"/>
-          </a:fontRef>
-        </p:style>
-        <p:txBody>
-          <a:bodyPr rtlCol="0" anchor="ctr"/>
-          <a:lstStyle/>
-          <a:p>
-            <a:pPr algn="ctr"/>
-          </a:p>
-        </p:txBody>
-      </p:sp>
-      <p:sp>
-        <p:nvSpPr>
-          <p:cNvPr id="12" name="TextBox 11"/>
-          <p:cNvSpPr txBox="1"/>
-          <p:nvPr/>
-        </p:nvSpPr>
-        <p:spPr>
-          <a:xfrm>
-            <a:off x="6248400" y="1976437"/>
-            <a:ext cx="2095500" cy="247650"/>
-          </a:xfrm>
-          <a:prstGeom prst="rect">
-            <a:avLst/>
-          </a:prstGeom>
-          <a:noFill/>
-        </p:spPr>
-        <p:txBody>
-          <a:bodyPr wrap="square" anchor="ctr">
-            <a:spAutoFit/>
-          </a:bodyPr>
-          <a:lstStyle/>
-          <a:p>
-            <a:pPr algn="l">
-              <a:lnSpc>
-                <a:spcPct val="100000"/>
-              </a:lnSpc>
-            </a:pPr>
-            <a:r>
-              <a:rPr sz="1000" b="0">
-                <a:solidFill>
-                  <a:srgbClr val="94A3B8"/>
-                </a:solidFill>
-                <a:latin typeface="PingFang SC"/>
-              </a:rPr>
-              <a:t>查询</a:t>
-            </a:r>
-          </a:p>
-        </p:txBody>
-      </p:sp>
-      <p:sp>
-        <p:nvSpPr>
-          <p:cNvPr id="13" name="Rounded Rectangle 12"/>
-          <p:cNvSpPr/>
-          <p:nvPr/>
-        </p:nvSpPr>
-        <p:spPr>
-          <a:xfrm>
-            <a:off x="1847850" y="2185987"/>
-            <a:ext cx="8877300" cy="1100137"/>
-          </a:xfrm>
-          <a:prstGeom prst="roundRect">
-            <a:avLst>
-              <a:gd name="adj" fmla="val 8000"/>
-            </a:avLst>
-          </a:prstGeom>
-          <a:solidFill>
-            <a:srgbClr val="F1F5F9"/>
-          </a:solidFill>
-          <a:ln>
-            <a:noFill/>
-          </a:ln>
-          <a:effectLst/>
-        </p:spPr>
-        <p:style>
-          <a:lnRef idx="1">
-            <a:schemeClr val="accent1"/>
-          </a:lnRef>
-          <a:fillRef idx="3">
-            <a:schemeClr val="accent1"/>
-          </a:fillRef>
-          <a:effectRef idx="2">
-            <a:schemeClr val="accent1"/>
-          </a:effectRef>
-          <a:fontRef idx="minor">
-            <a:schemeClr val="lt1"/>
-          </a:fontRef>
-        </p:style>
-        <p:txBody>
-          <a:bodyPr rtlCol="0" anchor="ctr"/>
-          <a:lstStyle/>
-          <a:p>
-            <a:pPr algn="ctr"/>
-          </a:p>
-        </p:txBody>
-      </p:sp>
-      <p:sp>
-        <p:nvSpPr>
-          <p:cNvPr id="14" name="Rounded Rectangle 13"/>
-          <p:cNvSpPr/>
-          <p:nvPr/>
-        </p:nvSpPr>
-        <p:spPr>
-          <a:xfrm>
-            <a:off x="1905000" y="2224087"/>
-            <a:ext cx="8763000" cy="1023937"/>
-          </a:xfrm>
-          <a:prstGeom prst="roundRect">
-            <a:avLst>
-              <a:gd name="adj" fmla="val 8000"/>
-            </a:avLst>
-          </a:prstGeom>
-          <a:solidFill>
-            <a:srgbClr val="FFFFFF"/>
-          </a:solidFill>
-          <a:ln w="12700">
-            <a:solidFill>
-              <a:srgbClr val="14B8A6"/>
-            </a:solidFill>
-          </a:ln>
-          <a:effectLst/>
-        </p:spPr>
-        <p:style>
-          <a:lnRef idx="1">
-            <a:schemeClr val="accent1"/>
-          </a:lnRef>
-          <a:fillRef idx="3">
-            <a:schemeClr val="accent1"/>
-          </a:fillRef>
-          <a:effectRef idx="2">
-            <a:schemeClr val="accent1"/>
-          </a:effectRef>
-          <a:fontRef idx="minor">
-            <a:schemeClr val="lt1"/>
-          </a:fontRef>
-        </p:style>
-        <p:txBody>
-          <a:bodyPr rtlCol="0" anchor="ctr"/>
-          <a:lstStyle/>
-          <a:p>
-            <a:pPr algn="ctr"/>
-          </a:p>
-        </p:txBody>
-      </p:sp>
-      <p:sp>
-        <p:nvSpPr>
-          <p:cNvPr id="15" name="Rectangle 14"/>
-          <p:cNvSpPr/>
-          <p:nvPr/>
-        </p:nvSpPr>
-        <p:spPr>
-          <a:xfrm>
-            <a:off x="1905000" y="2224087"/>
-            <a:ext cx="47625" cy="1023937"/>
-          </a:xfrm>
-          <a:prstGeom prst="rect">
-            <a:avLst/>
-          </a:prstGeom>
-          <a:solidFill>
-            <a:srgbClr val="14B8A6"/>
-          </a:solidFill>
-          <a:ln>
-            <a:noFill/>
-          </a:ln>
-          <a:effectLst/>
-        </p:spPr>
-        <p:style>
-          <a:lnRef idx="1">
-            <a:schemeClr val="accent1"/>
-          </a:lnRef>
-          <a:fillRef idx="3">
-            <a:schemeClr val="accent1"/>
-          </a:fillRef>
-          <a:effectRef idx="2">
-            <a:schemeClr val="accent1"/>
-          </a:effectRef>
-          <a:fontRef idx="minor">
-            <a:schemeClr val="lt1"/>
-          </a:fontRef>
-        </p:style>
-        <p:txBody>
-          <a:bodyPr rtlCol="0" anchor="ctr"/>
-          <a:lstStyle/>
-          <a:p>
-            <a:pPr algn="ctr"/>
-          </a:p>
-        </p:txBody>
-      </p:sp>
-      <p:sp>
-        <p:nvSpPr>
-          <p:cNvPr id="16" name="TextBox 15"/>
-          <p:cNvSpPr txBox="1"/>
-          <p:nvPr/>
-        </p:nvSpPr>
-        <p:spPr>
-          <a:xfrm>
-            <a:off x="2038350" y="2224087"/>
-            <a:ext cx="8534400" cy="1023937"/>
-          </a:xfrm>
-          <a:prstGeom prst="rect">
-            <a:avLst/>
-          </a:prstGeom>
-          <a:noFill/>
-        </p:spPr>
-        <p:txBody>
-          <a:bodyPr wrap="square" anchor="ctr">
-            <a:spAutoFit/>
-          </a:bodyPr>
-          <a:lstStyle/>
-          <a:p>
-            <a:pPr algn="l">
-              <a:lnSpc>
-                <a:spcPct val="100000"/>
-              </a:lnSpc>
-            </a:pPr>
-            <a:r>
-              <a:rPr sz="1200" b="1">
-                <a:solidFill>
-                  <a:srgbClr val="475569"/>
-                </a:solidFill>
-                <a:latin typeface="PingFang SC"/>
-              </a:rPr>
-              <a:t>详情页:步骤时间线+观察流</a:t>
-            </a:r>
-          </a:p>
-        </p:txBody>
-      </p:sp>
-      <p:cxnSp>
-        <p:nvCxnSpPr>
-          <p:cNvPr id="17" name="Connector 16"/>
-          <p:cNvCxnSpPr/>
-          <p:nvPr/>
-        </p:nvCxnSpPr>
-        <p:spPr>
-          <a:xfrm>
-            <a:off x="6096000" y="3305174"/>
-            <a:ext cx="0" cy="152400"/>
-          </a:xfrm>
-          <a:prstGeom prst="line">
-            <a:avLst/>
-          </a:prstGeom>
-          <a:ln w="15240">
-            <a:solidFill>
-              <a:srgbClr val="94A3B8"/>
-            </a:solidFill>
-          </a:ln>
-        </p:spPr>
-        <p:style>
-          <a:lnRef idx="2">
-            <a:schemeClr val="accent1"/>
-          </a:lnRef>
-          <a:fillRef idx="0">
-            <a:schemeClr val="accent1"/>
-          </a:fillRef>
-          <a:effectRef idx="1">
-            <a:schemeClr val="accent1"/>
-          </a:effectRef>
-          <a:fontRef idx="minor">
-            <a:schemeClr val="tx1"/>
-          </a:fontRef>
-        </p:style>
-      </p:cxnSp>
-      <p:sp>
-        <p:nvSpPr>
-          <p:cNvPr id="18" name="Isosceles Triangle 17"/>
-          <p:cNvSpPr/>
-          <p:nvPr/>
-        </p:nvSpPr>
-        <p:spPr>
-          <a:xfrm rot="10800000">
-            <a:off x="6053138" y="3371850"/>
-            <a:ext cx="85725" cy="85725"/>
-          </a:xfrm>
-          <a:prstGeom prst="triangle">
-            <a:avLst/>
-          </a:prstGeom>
-          <a:solidFill>
-            <a:srgbClr val="94A3B8"/>
-          </a:solidFill>
-          <a:ln>
-            <a:noFill/>
-          </a:ln>
-          <a:effectLst/>
-        </p:spPr>
-        <p:style>
-          <a:lnRef idx="1">
-            <a:schemeClr val="accent1"/>
-          </a:lnRef>
-          <a:fillRef idx="3">
-            <a:schemeClr val="accent1"/>
-          </a:fillRef>
-          <a:effectRef idx="2">
-            <a:schemeClr val="accent1"/>
-          </a:effectRef>
-          <a:fontRef idx="minor">
-            <a:schemeClr val="lt1"/>
-          </a:fontRef>
-        </p:style>
-        <p:txBody>
-          <a:bodyPr rtlCol="0" anchor="ctr"/>
-          <a:lstStyle/>
-          <a:p>
-            <a:pPr algn="ctr"/>
-          </a:p>
-        </p:txBody>
-      </p:sp>
-      <p:sp>
-        <p:nvSpPr>
-          <p:cNvPr id="19" name="TextBox 18"/>
-          <p:cNvSpPr txBox="1"/>
-          <p:nvPr/>
-        </p:nvSpPr>
-        <p:spPr>
-          <a:xfrm>
-            <a:off x="6248400" y="3248024"/>
-            <a:ext cx="2095500" cy="247650"/>
-          </a:xfrm>
-          <a:prstGeom prst="rect">
-            <a:avLst/>
-          </a:prstGeom>
-          <a:noFill/>
-        </p:spPr>
-        <p:txBody>
-          <a:bodyPr wrap="square" anchor="ctr">
-            <a:spAutoFit/>
-          </a:bodyPr>
-          <a:lstStyle/>
-          <a:p>
-            <a:pPr algn="l">
-              <a:lnSpc>
-                <a:spcPct val="100000"/>
-              </a:lnSpc>
-            </a:pPr>
-            <a:r>
-              <a:rPr sz="1000" b="0">
-                <a:solidFill>
-                  <a:srgbClr val="94A3B8"/>
-                </a:solidFill>
-                <a:latin typeface="PingFang SC"/>
-              </a:rPr>
-              <a:t>下钻</a:t>
-            </a:r>
-          </a:p>
-        </p:txBody>
-      </p:sp>
-      <p:sp>
-        <p:nvSpPr>
-          <p:cNvPr id="20" name="Rounded Rectangle 19"/>
-          <p:cNvSpPr/>
-          <p:nvPr/>
-        </p:nvSpPr>
-        <p:spPr>
-          <a:xfrm>
-            <a:off x="1847850" y="3457574"/>
-            <a:ext cx="8877300" cy="1100137"/>
-          </a:xfrm>
-          <a:prstGeom prst="roundRect">
-            <a:avLst>
-              <a:gd name="adj" fmla="val 8000"/>
-            </a:avLst>
-          </a:prstGeom>
-          <a:solidFill>
-            <a:srgbClr val="F1F5F9"/>
-          </a:solidFill>
-          <a:ln>
-            <a:noFill/>
-          </a:ln>
-          <a:effectLst/>
-        </p:spPr>
-        <p:style>
-          <a:lnRef idx="1">
-            <a:schemeClr val="accent1"/>
-          </a:lnRef>
-          <a:fillRef idx="3">
-            <a:schemeClr val="accent1"/>
-          </a:fillRef>
-          <a:effectRef idx="2">
-            <a:schemeClr val="accent1"/>
-          </a:effectRef>
-          <a:fontRef idx="minor">
-            <a:schemeClr val="lt1"/>
-          </a:fontRef>
-        </p:style>
-        <p:txBody>
-          <a:bodyPr rtlCol="0" anchor="ctr"/>
-          <a:lstStyle/>
-          <a:p>
-            <a:pPr algn="ctr"/>
-          </a:p>
-        </p:txBody>
-      </p:sp>
-      <p:sp>
-        <p:nvSpPr>
-          <p:cNvPr id="21" name="Rounded Rectangle 20"/>
-          <p:cNvSpPr/>
-          <p:nvPr/>
-        </p:nvSpPr>
-        <p:spPr>
-          <a:xfrm>
-            <a:off x="1905000" y="3495674"/>
-            <a:ext cx="8763000" cy="1023937"/>
-          </a:xfrm>
-          <a:prstGeom prst="roundRect">
-            <a:avLst>
-              <a:gd name="adj" fmla="val 8000"/>
-            </a:avLst>
-          </a:prstGeom>
-          <a:solidFill>
-            <a:srgbClr val="FFFFFF"/>
-          </a:solidFill>
-          <a:ln w="12700">
-            <a:solidFill>
-              <a:srgbClr val="8B5CF6"/>
-            </a:solidFill>
-          </a:ln>
-          <a:effectLst/>
-        </p:spPr>
-        <p:style>
-          <a:lnRef idx="1">
-            <a:schemeClr val="accent1"/>
-          </a:lnRef>
-          <a:fillRef idx="3">
-            <a:schemeClr val="accent1"/>
-          </a:fillRef>
-          <a:effectRef idx="2">
-            <a:schemeClr val="accent1"/>
-          </a:effectRef>
-          <a:fontRef idx="minor">
-            <a:schemeClr val="lt1"/>
-          </a:fontRef>
-        </p:style>
-        <p:txBody>
-          <a:bodyPr rtlCol="0" anchor="ctr"/>
-          <a:lstStyle/>
-          <a:p>
-            <a:pPr algn="ctr"/>
-          </a:p>
-        </p:txBody>
-      </p:sp>
-      <p:sp>
-        <p:nvSpPr>
-          <p:cNvPr id="22" name="Rectangle 21"/>
-          <p:cNvSpPr/>
-          <p:nvPr/>
-        </p:nvSpPr>
-        <p:spPr>
-          <a:xfrm>
-            <a:off x="1905000" y="3495674"/>
-            <a:ext cx="47625" cy="1023937"/>
-          </a:xfrm>
-          <a:prstGeom prst="rect">
-            <a:avLst/>
-          </a:prstGeom>
-          <a:solidFill>
-            <a:srgbClr val="8B5CF6"/>
-          </a:solidFill>
-          <a:ln>
-            <a:noFill/>
-          </a:ln>
-          <a:effectLst/>
-        </p:spPr>
-        <p:style>
-          <a:lnRef idx="1">
-            <a:schemeClr val="accent1"/>
-          </a:lnRef>
-          <a:fillRef idx="3">
-            <a:schemeClr val="accent1"/>
-          </a:fillRef>
-          <a:effectRef idx="2">
-            <a:schemeClr val="accent1"/>
-          </a:effectRef>
-          <a:fontRef idx="minor">
-            <a:schemeClr val="lt1"/>
-          </a:fontRef>
-        </p:style>
-        <p:txBody>
-          <a:bodyPr rtlCol="0" anchor="ctr"/>
-          <a:lstStyle/>
-          <a:p>
-            <a:pPr algn="ctr"/>
-          </a:p>
-        </p:txBody>
-      </p:sp>
-      <p:sp>
-        <p:nvSpPr>
-          <p:cNvPr id="23" name="TextBox 22"/>
-          <p:cNvSpPr txBox="1"/>
-          <p:nvPr/>
-        </p:nvSpPr>
-        <p:spPr>
-          <a:xfrm>
-            <a:off x="2038350" y="3495674"/>
-            <a:ext cx="8534400" cy="1023937"/>
-          </a:xfrm>
-          <a:prstGeom prst="rect">
-            <a:avLst/>
-          </a:prstGeom>
-          <a:noFill/>
-        </p:spPr>
-        <p:txBody>
-          <a:bodyPr wrap="square" anchor="ctr">
-            <a:spAutoFit/>
-          </a:bodyPr>
-          <a:lstStyle/>
-          <a:p>
-            <a:pPr algn="l">
-              <a:lnSpc>
-                <a:spcPct val="100000"/>
-              </a:lnSpc>
-            </a:pPr>
-            <a:r>
-              <a:rPr sz="1200" b="1">
-                <a:solidFill>
-                  <a:srgbClr val="475569"/>
-                </a:solidFill>
-                <a:latin typeface="PingFang SC"/>
-              </a:rPr>
-              <a:t>操作区:取消/接管/重试/确认</a:t>
-            </a:r>
-          </a:p>
-        </p:txBody>
-      </p:sp>
-      <p:cxnSp>
-        <p:nvCxnSpPr>
-          <p:cNvPr id="24" name="Connector 23"/>
-          <p:cNvCxnSpPr/>
-          <p:nvPr/>
-        </p:nvCxnSpPr>
-        <p:spPr>
-          <a:xfrm>
-            <a:off x="6096000" y="4576761"/>
-            <a:ext cx="0" cy="152400"/>
-          </a:xfrm>
-          <a:prstGeom prst="line">
-            <a:avLst/>
-          </a:prstGeom>
-          <a:ln w="15240">
-            <a:solidFill>
-              <a:srgbClr val="94A3B8"/>
-            </a:solidFill>
-          </a:ln>
-        </p:spPr>
-        <p:style>
-          <a:lnRef idx="2">
-            <a:schemeClr val="accent1"/>
-          </a:lnRef>
-          <a:fillRef idx="0">
-            <a:schemeClr val="accent1"/>
-          </a:fillRef>
-          <a:effectRef idx="1">
-            <a:schemeClr val="accent1"/>
-          </a:effectRef>
-          <a:fontRef idx="minor">
-            <a:schemeClr val="tx1"/>
-          </a:fontRef>
-        </p:style>
-      </p:cxnSp>
-      <p:sp>
-        <p:nvSpPr>
-          <p:cNvPr id="25" name="Isosceles Triangle 24"/>
-          <p:cNvSpPr/>
-          <p:nvPr/>
-        </p:nvSpPr>
-        <p:spPr>
-          <a:xfrm rot="10800000">
-            <a:off x="6053138" y="4643437"/>
-            <a:ext cx="85725" cy="85725"/>
-          </a:xfrm>
-          <a:prstGeom prst="triangle">
-            <a:avLst/>
-          </a:prstGeom>
-          <a:solidFill>
-            <a:srgbClr val="94A3B8"/>
-          </a:solidFill>
-          <a:ln>
-            <a:noFill/>
-          </a:ln>
-          <a:effectLst/>
-        </p:spPr>
-        <p:style>
-          <a:lnRef idx="1">
-            <a:schemeClr val="accent1"/>
-          </a:lnRef>
-          <a:fillRef idx="3">
-            <a:schemeClr val="accent1"/>
-          </a:fillRef>
-          <a:effectRef idx="2">
-            <a:schemeClr val="accent1"/>
-          </a:effectRef>
-          <a:fontRef idx="minor">
-            <a:schemeClr val="lt1"/>
-          </a:fontRef>
-        </p:style>
-        <p:txBody>
-          <a:bodyPr rtlCol="0" anchor="ctr"/>
-          <a:lstStyle/>
-          <a:p>
-            <a:pPr algn="ctr"/>
-          </a:p>
-        </p:txBody>
-      </p:sp>
-      <p:sp>
-        <p:nvSpPr>
-          <p:cNvPr id="26" name="TextBox 25"/>
-          <p:cNvSpPr txBox="1"/>
-          <p:nvPr/>
-        </p:nvSpPr>
-        <p:spPr>
-          <a:xfrm>
-            <a:off x="6248400" y="4519611"/>
-            <a:ext cx="2095500" cy="247650"/>
-          </a:xfrm>
-          <a:prstGeom prst="rect">
-            <a:avLst/>
-          </a:prstGeom>
-          <a:noFill/>
-        </p:spPr>
-        <p:txBody>
-          <a:bodyPr wrap="square" anchor="ctr">
-            <a:spAutoFit/>
-          </a:bodyPr>
-          <a:lstStyle/>
-          <a:p>
-            <a:pPr algn="l">
-              <a:lnSpc>
-                <a:spcPct val="100000"/>
-              </a:lnSpc>
-            </a:pPr>
-            <a:r>
-              <a:rPr sz="1000" b="0">
-                <a:solidFill>
-                  <a:srgbClr val="94A3B8"/>
-                </a:solidFill>
-                <a:latin typeface="PingFang SC"/>
-              </a:rPr>
-              <a:t>操作</a:t>
-            </a:r>
-          </a:p>
-        </p:txBody>
-      </p:sp>
-      <p:sp>
-        <p:nvSpPr>
-          <p:cNvPr id="27" name="Rounded Rectangle 26"/>
-          <p:cNvSpPr/>
-          <p:nvPr/>
-        </p:nvSpPr>
-        <p:spPr>
-          <a:xfrm>
-            <a:off x="1847850" y="4729161"/>
-            <a:ext cx="8877300" cy="1100137"/>
-          </a:xfrm>
-          <a:prstGeom prst="roundRect">
-            <a:avLst>
-              <a:gd name="adj" fmla="val 8000"/>
-            </a:avLst>
-          </a:prstGeom>
-          <a:solidFill>
-            <a:srgbClr val="F1F5F9"/>
-          </a:solidFill>
-          <a:ln>
-            <a:noFill/>
-          </a:ln>
-          <a:effectLst/>
-        </p:spPr>
-        <p:style>
-          <a:lnRef idx="1">
-            <a:schemeClr val="accent1"/>
-          </a:lnRef>
-          <a:fillRef idx="3">
-            <a:schemeClr val="accent1"/>
-          </a:fillRef>
-          <a:effectRef idx="2">
-            <a:schemeClr val="accent1"/>
-          </a:effectRef>
-          <a:fontRef idx="minor">
-            <a:schemeClr val="lt1"/>
-          </a:fontRef>
-        </p:style>
-        <p:txBody>
-          <a:bodyPr rtlCol="0" anchor="ctr"/>
-          <a:lstStyle/>
-          <a:p>
-            <a:pPr algn="ctr"/>
-          </a:p>
-        </p:txBody>
-      </p:sp>
-      <p:sp>
-        <p:nvSpPr>
-          <p:cNvPr id="28" name="Rounded Rectangle 27"/>
-          <p:cNvSpPr/>
-          <p:nvPr/>
-        </p:nvSpPr>
-        <p:spPr>
-          <a:xfrm>
-            <a:off x="1905000" y="4767261"/>
-            <a:ext cx="8763000" cy="1023937"/>
-          </a:xfrm>
-          <a:prstGeom prst="roundRect">
-            <a:avLst>
-              <a:gd name="adj" fmla="val 8000"/>
-            </a:avLst>
-          </a:prstGeom>
-          <a:solidFill>
-            <a:srgbClr val="FFFFFF"/>
-          </a:solidFill>
-          <a:ln w="12700">
-            <a:solidFill>
-              <a:srgbClr val="F59E0B"/>
-            </a:solidFill>
-          </a:ln>
-          <a:effectLst/>
-        </p:spPr>
-        <p:style>
-          <a:lnRef idx="1">
-            <a:schemeClr val="accent1"/>
-          </a:lnRef>
-          <a:fillRef idx="3">
-            <a:schemeClr val="accent1"/>
-          </a:fillRef>
-          <a:effectRef idx="2">
-            <a:schemeClr val="accent1"/>
-          </a:effectRef>
-          <a:fontRef idx="minor">
-            <a:schemeClr val="lt1"/>
-          </a:fontRef>
-        </p:style>
-        <p:txBody>
-          <a:bodyPr rtlCol="0" anchor="ctr"/>
-          <a:lstStyle/>
-          <a:p>
-            <a:pPr algn="ctr"/>
-          </a:p>
-        </p:txBody>
-      </p:sp>
-      <p:sp>
-        <p:nvSpPr>
-          <p:cNvPr id="29" name="Rectangle 28"/>
-          <p:cNvSpPr/>
-          <p:nvPr/>
-        </p:nvSpPr>
-        <p:spPr>
-          <a:xfrm>
-            <a:off x="1905000" y="4767261"/>
-            <a:ext cx="47625" cy="1023937"/>
-          </a:xfrm>
-          <a:prstGeom prst="rect">
-            <a:avLst/>
-          </a:prstGeom>
-          <a:solidFill>
-            <a:srgbClr val="F59E0B"/>
-          </a:solidFill>
-          <a:ln>
-            <a:noFill/>
-          </a:ln>
-          <a:effectLst/>
-        </p:spPr>
-        <p:style>
-          <a:lnRef idx="1">
-            <a:schemeClr val="accent1"/>
-          </a:lnRef>
-          <a:fillRef idx="3">
-            <a:schemeClr val="accent1"/>
-          </a:fillRef>
-          <a:effectRef idx="2">
-            <a:schemeClr val="accent1"/>
-          </a:effectRef>
-          <a:fontRef idx="minor">
-            <a:schemeClr val="lt1"/>
-          </a:fontRef>
-        </p:style>
-        <p:txBody>
-          <a:bodyPr rtlCol="0" anchor="ctr"/>
-          <a:lstStyle/>
-          <a:p>
-            <a:pPr algn="ctr"/>
-          </a:p>
-        </p:txBody>
-      </p:sp>
-      <p:sp>
-        <p:nvSpPr>
-          <p:cNvPr id="30" name="TextBox 29"/>
-          <p:cNvSpPr txBox="1"/>
-          <p:nvPr/>
-        </p:nvSpPr>
-        <p:spPr>
-          <a:xfrm>
-            <a:off x="2038350" y="4767261"/>
-            <a:ext cx="8534400" cy="1023937"/>
-          </a:xfrm>
-          <a:prstGeom prst="rect">
-            <a:avLst/>
-          </a:prstGeom>
-          <a:noFill/>
-        </p:spPr>
-        <p:txBody>
-          <a:bodyPr wrap="square" anchor="ctr">
-            <a:spAutoFit/>
-          </a:bodyPr>
-          <a:lstStyle/>
-          <a:p>
-            <a:pPr algn="l">
-              <a:lnSpc>
-                <a:spcPct val="100000"/>
-              </a:lnSpc>
-            </a:pPr>
-            <a:r>
-              <a:rPr sz="1200" b="1">
-                <a:solidFill>
-                  <a:srgbClr val="475569"/>
-                </a:solidFill>
-                <a:latin typeface="PingFang SC"/>
-              </a:rPr>
-              <a:t>数据面:GraphQL 查询+Trace|GraphQL BFF 的典型消费方</a:t>
-            </a:r>
-          </a:p>
-        </p:txBody>
-      </p:sp>
-      <p:sp>
-        <p:nvSpPr>
-          <p:cNvPr id="31" name="TextBox 30"/>
-          <p:cNvSpPr txBox="1"/>
-          <p:nvPr/>
-        </p:nvSpPr>
-        <p:spPr>
-          <a:xfrm>
-            <a:off x="10287000" y="6534150"/>
-            <a:ext cx="1619250" cy="266700"/>
-          </a:xfrm>
-          <a:prstGeom prst="rect">
-            <a:avLst/>
-          </a:prstGeom>
-          <a:noFill/>
-        </p:spPr>
-        <p:txBody>
-          <a:bodyPr wrap="square" anchor="ctr">
-            <a:spAutoFit/>
-          </a:bodyPr>
-          <a:lstStyle/>
-          <a:p>
-            <a:pPr algn="r">
-              <a:lnSpc>
-                <a:spcPct val="100000"/>
-              </a:lnSpc>
-            </a:pPr>
-            <a:r>
               <a:rPr sz="900" b="0">
                 <a:solidFill>
                   <a:srgbClr val="94A3B8"/>
@@ -16086,7 +16372,7 @@
       </p:sp>
       <p:sp>
         <p:nvSpPr>
-          <p:cNvPr id="32" name="TextBox 31"/>
+          <p:cNvPr id="38" name="TextBox 37"/>
           <p:cNvSpPr txBox="1"/>
           <p:nvPr/>
         </p:nvSpPr>
@@ -24734,8 +25020,8 @@
         </p:nvSpPr>
         <p:spPr>
           <a:xfrm>
-            <a:off x="3714750" y="1905000"/>
-            <a:ext cx="2228850" cy="1047750"/>
+            <a:off x="2524125" y="2000250"/>
+            <a:ext cx="2190750" cy="552450"/>
           </a:xfrm>
           <a:prstGeom prst="roundRect">
             <a:avLst>
@@ -24782,8 +25068,8 @@
         </p:nvSpPr>
         <p:spPr>
           <a:xfrm>
-            <a:off x="3714750" y="1905000"/>
-            <a:ext cx="2228850" cy="1047750"/>
+            <a:off x="2524125" y="2000250"/>
+            <a:ext cx="2190750" cy="552450"/>
           </a:xfrm>
           <a:prstGeom prst="rect">
             <a:avLst/>
@@ -24804,7 +25090,7 @@
             <a:r>
               <a:rPr sz="1300" b="1">
                 <a:solidFill>
-                  <a:srgbClr val="475569"/>
+                  <a:srgbClr val="0B1D3A"/>
                 </a:solidFill>
                 <a:latin typeface="PingFang SC"/>
               </a:rPr>
@@ -24821,8 +25107,8 @@
         </p:nvSpPr>
         <p:spPr>
           <a:xfrm>
-            <a:off x="6096000" y="1905000"/>
-            <a:ext cx="2228850" cy="1047750"/>
+            <a:off x="7477125" y="2000250"/>
+            <a:ext cx="2190750" cy="552450"/>
           </a:xfrm>
           <a:prstGeom prst="roundRect">
             <a:avLst>
@@ -24869,8 +25155,8 @@
         </p:nvSpPr>
         <p:spPr>
           <a:xfrm>
-            <a:off x="6096000" y="1905000"/>
-            <a:ext cx="2228850" cy="1047750"/>
+            <a:off x="7477125" y="2000250"/>
+            <a:ext cx="2190750" cy="552450"/>
           </a:xfrm>
           <a:prstGeom prst="rect">
             <a:avLst/>
@@ -24891,7 +25177,7 @@
             <a:r>
               <a:rPr sz="1300" b="1">
                 <a:solidFill>
-                  <a:srgbClr val="475569"/>
+                  <a:srgbClr val="0B1D3A"/>
                 </a:solidFill>
                 <a:latin typeface="PingFang SC"/>
               </a:rPr>
@@ -24908,8 +25194,8 @@
         </p:nvSpPr>
         <p:spPr>
           <a:xfrm>
-            <a:off x="3714750" y="3524250"/>
-            <a:ext cx="2228850" cy="1047750"/>
+            <a:off x="2524125" y="3429000"/>
+            <a:ext cx="2190750" cy="552450"/>
           </a:xfrm>
           <a:prstGeom prst="roundRect">
             <a:avLst>
@@ -24954,8 +25240,8 @@
         </p:nvSpPr>
         <p:spPr>
           <a:xfrm>
-            <a:off x="3714750" y="3524250"/>
-            <a:ext cx="2228850" cy="1047750"/>
+            <a:off x="2524125" y="3429000"/>
+            <a:ext cx="2190750" cy="552450"/>
           </a:xfrm>
           <a:prstGeom prst="rect">
             <a:avLst/>
@@ -24993,8 +25279,8 @@
         </p:nvSpPr>
         <p:spPr>
           <a:xfrm>
-            <a:off x="6096000" y="3524250"/>
-            <a:ext cx="2228850" cy="1047750"/>
+            <a:off x="7477125" y="3429000"/>
+            <a:ext cx="2190750" cy="552450"/>
           </a:xfrm>
           <a:prstGeom prst="roundRect">
             <a:avLst>
@@ -25039,8 +25325,8 @@
         </p:nvSpPr>
         <p:spPr>
           <a:xfrm>
-            <a:off x="6096000" y="3524250"/>
-            <a:ext cx="2228850" cy="1047750"/>
+            <a:off x="7477125" y="3429000"/>
+            <a:ext cx="2190750" cy="552450"/>
           </a:xfrm>
           <a:prstGeom prst="rect">
             <a:avLst/>
@@ -25078,15 +25364,15 @@
         </p:nvCxnSpPr>
         <p:spPr>
           <a:xfrm>
-            <a:off x="5943600" y="2428875"/>
-            <a:ext cx="152400" cy="0"/>
+            <a:off x="4714875" y="2276475"/>
+            <a:ext cx="2695575" cy="0"/>
           </a:xfrm>
           <a:prstGeom prst="line">
             <a:avLst/>
           </a:prstGeom>
-          <a:ln w="17780">
+          <a:ln w="19050">
             <a:solidFill>
-              <a:srgbClr val="475569"/>
+              <a:srgbClr val="2563EB"/>
             </a:solidFill>
           </a:ln>
         </p:spPr>
@@ -25113,14 +25399,14 @@
         </p:nvSpPr>
         <p:spPr>
           <a:xfrm rot="5400000">
-            <a:off x="6010276" y="2386013"/>
+            <a:off x="7324726" y="2233613"/>
             <a:ext cx="85725" cy="85725"/>
           </a:xfrm>
           <a:prstGeom prst="triangle">
             <a:avLst/>
           </a:prstGeom>
           <a:solidFill>
-            <a:srgbClr val="475569"/>
+            <a:srgbClr val="2563EB"/>
           </a:solidFill>
           <a:ln>
             <a:noFill/>
@@ -25151,14 +25437,62 @@
       </p:sp>
       <p:sp>
         <p:nvSpPr>
-          <p:cNvPr id="15" name="TextBox 14"/>
+          <p:cNvPr id="15" name="Rounded Rectangle 14"/>
+          <p:cNvSpPr/>
+          <p:nvPr/>
+        </p:nvSpPr>
+        <p:spPr>
+          <a:xfrm>
+            <a:off x="5500687" y="2133600"/>
+            <a:ext cx="1123950" cy="285750"/>
+          </a:xfrm>
+          <a:prstGeom prst="roundRect">
+            <a:avLst>
+              <a:gd name="adj" fmla="val 8000"/>
+            </a:avLst>
+          </a:prstGeom>
+          <a:solidFill>
+            <a:srgbClr val="FFFFFF"/>
+          </a:solidFill>
+          <a:ln w="12700">
+            <a:solidFill>
+              <a:srgbClr val="DDE5EE"/>
+            </a:solidFill>
+          </a:ln>
+          <a:effectLst/>
+        </p:spPr>
+        <p:style>
+          <a:lnRef idx="1">
+            <a:schemeClr val="accent1"/>
+          </a:lnRef>
+          <a:fillRef idx="3">
+            <a:schemeClr val="accent1"/>
+          </a:fillRef>
+          <a:effectRef idx="2">
+            <a:schemeClr val="accent1"/>
+          </a:effectRef>
+          <a:fontRef idx="minor">
+            <a:schemeClr val="lt1"/>
+          </a:fontRef>
+        </p:style>
+        <p:txBody>
+          <a:bodyPr rtlCol="0" anchor="ctr"/>
+          <a:lstStyle/>
+          <a:p>
+            <a:pPr algn="ctr"/>
+          </a:p>
+        </p:txBody>
+      </p:sp>
+      <p:sp>
+        <p:nvSpPr>
+          <p:cNvPr id="16" name="TextBox 15"/>
           <p:cNvSpPr txBox="1"/>
           <p:nvPr/>
         </p:nvSpPr>
         <p:spPr>
           <a:xfrm>
-            <a:off x="5162550" y="2105025"/>
-            <a:ext cx="1714500" cy="228600"/>
+            <a:off x="5500687" y="2133600"/>
+            <a:ext cx="1123950" cy="285750"/>
           </a:xfrm>
           <a:prstGeom prst="rect">
             <a:avLst/>
@@ -25177,9 +25511,9 @@
               </a:lnSpc>
             </a:pPr>
             <a:r>
-              <a:rPr sz="900" b="0">
-                <a:solidFill>
-                  <a:srgbClr val="94A3B8"/>
+              <a:rPr sz="1100" b="1">
+                <a:solidFill>
+                  <a:srgbClr val="0B1D3A"/>
                 </a:solidFill>
                 <a:latin typeface="PingFang SC"/>
               </a:rPr>
@@ -25190,21 +25524,21 @@
       </p:sp>
       <p:cxnSp>
         <p:nvCxnSpPr>
-          <p:cNvPr id="16" name="Connector 15"/>
+          <p:cNvPr id="17" name="Connector 16"/>
           <p:cNvCxnSpPr/>
           <p:nvPr/>
         </p:nvCxnSpPr>
         <p:spPr>
           <a:xfrm flipH="1">
-            <a:off x="5943600" y="2428875"/>
-            <a:ext cx="1266825" cy="0"/>
+            <a:off x="4781550" y="2276475"/>
+            <a:ext cx="2695575" cy="0"/>
           </a:xfrm>
           <a:prstGeom prst="line">
             <a:avLst/>
           </a:prstGeom>
-          <a:ln w="17780">
+          <a:ln w="19050">
             <a:solidFill>
-              <a:srgbClr val="475569"/>
+              <a:srgbClr val="F87171"/>
             </a:solidFill>
           </a:ln>
         </p:spPr>
@@ -25225,20 +25559,20 @@
       </p:cxnSp>
       <p:sp>
         <p:nvSpPr>
-          <p:cNvPr id="17" name="Isosceles Triangle 16"/>
+          <p:cNvPr id="18" name="Isosceles Triangle 17"/>
           <p:cNvSpPr/>
           <p:nvPr/>
         </p:nvSpPr>
         <p:spPr>
           <a:xfrm rot="16200000">
-            <a:off x="5943600" y="2386013"/>
+            <a:off x="4781550" y="2233613"/>
             <a:ext cx="85725" cy="85725"/>
           </a:xfrm>
           <a:prstGeom prst="triangle">
             <a:avLst/>
           </a:prstGeom>
           <a:solidFill>
-            <a:srgbClr val="475569"/>
+            <a:srgbClr val="F87171"/>
           </a:solidFill>
           <a:ln>
             <a:noFill/>
@@ -25269,14 +25603,62 @@
       </p:sp>
       <p:sp>
         <p:nvSpPr>
-          <p:cNvPr id="18" name="TextBox 17"/>
+          <p:cNvPr id="19" name="Rounded Rectangle 18"/>
+          <p:cNvSpPr/>
+          <p:nvPr/>
+        </p:nvSpPr>
+        <p:spPr>
+          <a:xfrm>
+            <a:off x="5357812" y="2133600"/>
+            <a:ext cx="1543050" cy="285750"/>
+          </a:xfrm>
+          <a:prstGeom prst="roundRect">
+            <a:avLst>
+              <a:gd name="adj" fmla="val 8000"/>
+            </a:avLst>
+          </a:prstGeom>
+          <a:solidFill>
+            <a:srgbClr val="FFFFFF"/>
+          </a:solidFill>
+          <a:ln w="12700">
+            <a:solidFill>
+              <a:srgbClr val="DDE5EE"/>
+            </a:solidFill>
+          </a:ln>
+          <a:effectLst/>
+        </p:spPr>
+        <p:style>
+          <a:lnRef idx="1">
+            <a:schemeClr val="accent1"/>
+          </a:lnRef>
+          <a:fillRef idx="3">
+            <a:schemeClr val="accent1"/>
+          </a:fillRef>
+          <a:effectRef idx="2">
+            <a:schemeClr val="accent1"/>
+          </a:effectRef>
+          <a:fontRef idx="minor">
+            <a:schemeClr val="lt1"/>
+          </a:fontRef>
+        </p:style>
+        <p:txBody>
+          <a:bodyPr rtlCol="0" anchor="ctr"/>
+          <a:lstStyle/>
+          <a:p>
+            <a:pPr algn="ctr"/>
+          </a:p>
+        </p:txBody>
+      </p:sp>
+      <p:sp>
+        <p:nvSpPr>
+          <p:cNvPr id="20" name="TextBox 19"/>
           <p:cNvSpPr txBox="1"/>
           <p:nvPr/>
         </p:nvSpPr>
         <p:spPr>
           <a:xfrm>
-            <a:off x="5643562" y="2105025"/>
-            <a:ext cx="1714500" cy="228600"/>
+            <a:off x="5357812" y="2133600"/>
+            <a:ext cx="1543050" cy="285750"/>
           </a:xfrm>
           <a:prstGeom prst="rect">
             <a:avLst/>
@@ -25295,34 +25677,34 @@
               </a:lnSpc>
             </a:pPr>
             <a:r>
-              <a:rPr sz="900" b="0">
-                <a:solidFill>
-                  <a:srgbClr val="94A3B8"/>
+              <a:rPr sz="1100" b="1">
+                <a:solidFill>
+                  <a:srgbClr val="0B1D3A"/>
                 </a:solidFill>
                 <a:latin typeface="PingFang SC"/>
               </a:rPr>
-              <a:t>approved</a:t>
+              <a:t>approv</a:t>
             </a:r>
           </a:p>
         </p:txBody>
       </p:sp>
       <p:cxnSp>
         <p:nvCxnSpPr>
-          <p:cNvPr id="19" name="Connector 18"/>
+          <p:cNvPr id="21" name="Connector 20"/>
           <p:cNvCxnSpPr/>
           <p:nvPr/>
         </p:nvCxnSpPr>
         <p:spPr>
           <a:xfrm>
-            <a:off x="7210425" y="2952750"/>
-            <a:ext cx="0" cy="571500"/>
+            <a:off x="8572500" y="2552700"/>
+            <a:ext cx="0" cy="809625"/>
           </a:xfrm>
           <a:prstGeom prst="line">
             <a:avLst/>
           </a:prstGeom>
-          <a:ln w="17780">
+          <a:ln w="19050">
             <a:solidFill>
-              <a:srgbClr val="475569"/>
+              <a:srgbClr val="2563EB"/>
             </a:solidFill>
           </a:ln>
         </p:spPr>
@@ -25343,20 +25725,20 @@
       </p:cxnSp>
       <p:sp>
         <p:nvSpPr>
-          <p:cNvPr id="20" name="Isosceles Triangle 19"/>
+          <p:cNvPr id="22" name="Isosceles Triangle 21"/>
           <p:cNvSpPr/>
           <p:nvPr/>
         </p:nvSpPr>
         <p:spPr>
           <a:xfrm rot="10800000">
-            <a:off x="7167563" y="3438526"/>
+            <a:off x="8529638" y="3276601"/>
             <a:ext cx="85725" cy="85725"/>
           </a:xfrm>
           <a:prstGeom prst="triangle">
             <a:avLst/>
           </a:prstGeom>
           <a:solidFill>
-            <a:srgbClr val="475569"/>
+            <a:srgbClr val="2563EB"/>
           </a:solidFill>
           <a:ln>
             <a:noFill/>
@@ -25387,14 +25769,62 @@
       </p:sp>
       <p:sp>
         <p:nvSpPr>
-          <p:cNvPr id="21" name="TextBox 20"/>
+          <p:cNvPr id="23" name="Rounded Rectangle 22"/>
+          <p:cNvSpPr/>
+          <p:nvPr/>
+        </p:nvSpPr>
+        <p:spPr>
+          <a:xfrm>
+            <a:off x="7905750" y="2814637"/>
+            <a:ext cx="1333500" cy="285750"/>
+          </a:xfrm>
+          <a:prstGeom prst="roundRect">
+            <a:avLst>
+              <a:gd name="adj" fmla="val 8000"/>
+            </a:avLst>
+          </a:prstGeom>
+          <a:solidFill>
+            <a:srgbClr val="FFFFFF"/>
+          </a:solidFill>
+          <a:ln w="12700">
+            <a:solidFill>
+              <a:srgbClr val="DDE5EE"/>
+            </a:solidFill>
+          </a:ln>
+          <a:effectLst/>
+        </p:spPr>
+        <p:style>
+          <a:lnRef idx="1">
+            <a:schemeClr val="accent1"/>
+          </a:lnRef>
+          <a:fillRef idx="3">
+            <a:schemeClr val="accent1"/>
+          </a:fillRef>
+          <a:effectRef idx="2">
+            <a:schemeClr val="accent1"/>
+          </a:effectRef>
+          <a:fontRef idx="minor">
+            <a:schemeClr val="lt1"/>
+          </a:fontRef>
+        </p:style>
+        <p:txBody>
+          <a:bodyPr rtlCol="0" anchor="ctr"/>
+          <a:lstStyle/>
+          <a:p>
+            <a:pPr algn="ctr"/>
+          </a:p>
+        </p:txBody>
+      </p:sp>
+      <p:sp>
+        <p:nvSpPr>
+          <p:cNvPr id="24" name="TextBox 23"/>
           <p:cNvSpPr txBox="1"/>
           <p:nvPr/>
         </p:nvSpPr>
         <p:spPr>
           <a:xfrm>
-            <a:off x="6834187" y="2105025"/>
-            <a:ext cx="1714500" cy="228600"/>
+            <a:off x="7905750" y="2814637"/>
+            <a:ext cx="1333500" cy="285750"/>
           </a:xfrm>
           <a:prstGeom prst="rect">
             <a:avLst/>
@@ -25413,9 +25843,9 @@
               </a:lnSpc>
             </a:pPr>
             <a:r>
-              <a:rPr sz="900" b="0">
-                <a:solidFill>
-                  <a:srgbClr val="94A3B8"/>
+              <a:rPr sz="1100" b="1">
+                <a:solidFill>
+                  <a:srgbClr val="0B1D3A"/>
                 </a:solidFill>
                 <a:latin typeface="PingFang SC"/>
               </a:rPr>
@@ -25426,21 +25856,21 @@
       </p:sp>
       <p:cxnSp>
         <p:nvCxnSpPr>
-          <p:cNvPr id="22" name="Connector 21"/>
+          <p:cNvPr id="25" name="Connector 24"/>
           <p:cNvCxnSpPr/>
           <p:nvPr/>
         </p:nvCxnSpPr>
         <p:spPr>
           <a:xfrm>
-            <a:off x="4829175" y="2952750"/>
-            <a:ext cx="0" cy="571500"/>
+            <a:off x="3619500" y="2552700"/>
+            <a:ext cx="0" cy="809625"/>
           </a:xfrm>
           <a:prstGeom prst="line">
             <a:avLst/>
           </a:prstGeom>
-          <a:ln w="17780">
+          <a:ln w="19050">
             <a:solidFill>
-              <a:srgbClr val="475569"/>
+              <a:srgbClr val="2563EB"/>
             </a:solidFill>
           </a:ln>
         </p:spPr>
@@ -25461,20 +25891,20 @@
       </p:cxnSp>
       <p:sp>
         <p:nvSpPr>
-          <p:cNvPr id="23" name="Isosceles Triangle 22"/>
+          <p:cNvPr id="26" name="Isosceles Triangle 25"/>
           <p:cNvSpPr/>
           <p:nvPr/>
         </p:nvSpPr>
         <p:spPr>
           <a:xfrm rot="10800000">
-            <a:off x="4786313" y="3438526"/>
+            <a:off x="3576638" y="3276601"/>
             <a:ext cx="85725" cy="85725"/>
           </a:xfrm>
           <a:prstGeom prst="triangle">
             <a:avLst/>
           </a:prstGeom>
           <a:solidFill>
-            <a:srgbClr val="475569"/>
+            <a:srgbClr val="2563EB"/>
           </a:solidFill>
           <a:ln>
             <a:noFill/>
@@ -25505,14 +25935,62 @@
       </p:sp>
       <p:sp>
         <p:nvSpPr>
-          <p:cNvPr id="24" name="TextBox 23"/>
+          <p:cNvPr id="27" name="Rounded Rectangle 26"/>
+          <p:cNvSpPr/>
+          <p:nvPr/>
+        </p:nvSpPr>
+        <p:spPr>
+          <a:xfrm>
+            <a:off x="2847975" y="2814637"/>
+            <a:ext cx="1543050" cy="285750"/>
+          </a:xfrm>
+          <a:prstGeom prst="roundRect">
+            <a:avLst>
+              <a:gd name="adj" fmla="val 8000"/>
+            </a:avLst>
+          </a:prstGeom>
+          <a:solidFill>
+            <a:srgbClr val="FFFFFF"/>
+          </a:solidFill>
+          <a:ln w="12700">
+            <a:solidFill>
+              <a:srgbClr val="DDE5EE"/>
+            </a:solidFill>
+          </a:ln>
+          <a:effectLst/>
+        </p:spPr>
+        <p:style>
+          <a:lnRef idx="1">
+            <a:schemeClr val="accent1"/>
+          </a:lnRef>
+          <a:fillRef idx="3">
+            <a:schemeClr val="accent1"/>
+          </a:fillRef>
+          <a:effectRef idx="2">
+            <a:schemeClr val="accent1"/>
+          </a:effectRef>
+          <a:fontRef idx="minor">
+            <a:schemeClr val="lt1"/>
+          </a:fontRef>
+        </p:style>
+        <p:txBody>
+          <a:bodyPr rtlCol="0" anchor="ctr"/>
+          <a:lstStyle/>
+          <a:p>
+            <a:pPr algn="ctr"/>
+          </a:p>
+        </p:txBody>
+      </p:sp>
+      <p:sp>
+        <p:nvSpPr>
+          <p:cNvPr id="28" name="TextBox 27"/>
           <p:cNvSpPr txBox="1"/>
           <p:nvPr/>
         </p:nvSpPr>
         <p:spPr>
           <a:xfrm>
-            <a:off x="4452937" y="2105025"/>
-            <a:ext cx="1714500" cy="228600"/>
+            <a:off x="2847975" y="2814637"/>
+            <a:ext cx="1543050" cy="285750"/>
           </a:xfrm>
           <a:prstGeom prst="rect">
             <a:avLst/>
@@ -25531,20 +26009,20 @@
               </a:lnSpc>
             </a:pPr>
             <a:r>
-              <a:rPr sz="900" b="0">
-                <a:solidFill>
-                  <a:srgbClr val="94A3B8"/>
+              <a:rPr sz="1100" b="1">
+                <a:solidFill>
+                  <a:srgbClr val="0B1D3A"/>
                 </a:solidFill>
                 <a:latin typeface="PingFang SC"/>
               </a:rPr>
-              <a:t>finish|HITL 的一等公民态</a:t>
-            </a:r>
-          </a:p>
-        </p:txBody>
-      </p:sp>
-      <p:sp>
-        <p:nvSpPr>
-          <p:cNvPr id="25" name="TextBox 24"/>
+              <a:t>finish</a:t>
+            </a:r>
+          </a:p>
+        </p:txBody>
+      </p:sp>
+      <p:sp>
+        <p:nvSpPr>
+          <p:cNvPr id="29" name="TextBox 28"/>
           <p:cNvSpPr txBox="1"/>
           <p:nvPr/>
         </p:nvSpPr>
@@ -25583,7 +26061,7 @@
       </p:sp>
       <p:sp>
         <p:nvSpPr>
-          <p:cNvPr id="26" name="TextBox 25"/>
+          <p:cNvPr id="30" name="TextBox 29"/>
           <p:cNvSpPr txBox="1"/>
           <p:nvPr/>
         </p:nvSpPr>
@@ -27775,7 +28253,7 @@
                 </a:solidFill>
                 <a:latin typeface="PingFang SC"/>
               </a:rPr>
-              <a:t>版本+修订记录|最小集:够恢复就行</a:t>
+              <a:t>版本+修订记录</a:t>
             </a:r>
           </a:p>
         </p:txBody>

--- a/03-课件PPT/讲次版/第3章-3-讲次 3-3 · State Machine 与 Che.pptx
+++ b/03-课件PPT/讲次版/第3章-3-讲次 3-3 · State Machine 与 Che.pptx
@@ -15163,7 +15163,7 @@
           <a:noFill/>
         </p:spPr>
         <p:txBody>
-          <a:bodyPr wrap="none" anchor="ctr">
+          <a:bodyPr wrap="square" anchor="ctr">
             <a:spAutoFit/>
           </a:bodyPr>
           <a:lstStyle/>
@@ -15174,7 +15174,7 @@
               </a:lnSpc>
             </a:pPr>
             <a:r>
-              <a:rPr sz="1100" b="1">
+              <a:rPr sz="1300" b="1">
                 <a:solidFill>
                   <a:srgbClr val="0B1D3A"/>
                 </a:solidFill>
@@ -15545,7 +15545,7 @@
           <a:noFill/>
         </p:spPr>
         <p:txBody>
-          <a:bodyPr wrap="none" anchor="ctr">
+          <a:bodyPr wrap="square" anchor="ctr">
             <a:spAutoFit/>
           </a:bodyPr>
           <a:lstStyle/>
@@ -15556,7 +15556,7 @@
               </a:lnSpc>
             </a:pPr>
             <a:r>
-              <a:rPr sz="1100" b="1">
+              <a:rPr sz="1300" b="1">
                 <a:solidFill>
                   <a:srgbClr val="0B1D3A"/>
                 </a:solidFill>
@@ -15927,7 +15927,7 @@
           <a:noFill/>
         </p:spPr>
         <p:txBody>
-          <a:bodyPr wrap="none" anchor="ctr">
+          <a:bodyPr wrap="square" anchor="ctr">
             <a:spAutoFit/>
           </a:bodyPr>
           <a:lstStyle/>
@@ -15938,7 +15938,7 @@
               </a:lnSpc>
             </a:pPr>
             <a:r>
-              <a:rPr sz="1100" b="1">
+              <a:rPr sz="1300" b="1">
                 <a:solidFill>
                   <a:srgbClr val="0B1D3A"/>
                 </a:solidFill>
@@ -16309,7 +16309,7 @@
           <a:noFill/>
         </p:spPr>
         <p:txBody>
-          <a:bodyPr wrap="none" anchor="ctr">
+          <a:bodyPr wrap="square" anchor="ctr">
             <a:spAutoFit/>
           </a:bodyPr>
           <a:lstStyle/>
@@ -16320,7 +16320,7 @@
               </a:lnSpc>
             </a:pPr>
             <a:r>
-              <a:rPr sz="900" b="1">
+              <a:rPr sz="1300" b="1">
                 <a:solidFill>
                   <a:srgbClr val="0B1D3A"/>
                 </a:solidFill>
@@ -25443,8 +25443,8 @@
         </p:nvSpPr>
         <p:spPr>
           <a:xfrm>
-            <a:off x="5500687" y="2133600"/>
-            <a:ext cx="1123950" cy="285750"/>
+            <a:off x="5500687" y="2124075"/>
+            <a:ext cx="1123950" cy="304800"/>
           </a:xfrm>
           <a:prstGeom prst="roundRect">
             <a:avLst>
@@ -25491,8 +25491,8 @@
         </p:nvSpPr>
         <p:spPr>
           <a:xfrm>
-            <a:off x="5500687" y="2133600"/>
-            <a:ext cx="1123950" cy="285750"/>
+            <a:off x="5500687" y="2124075"/>
+            <a:ext cx="1123950" cy="304800"/>
           </a:xfrm>
           <a:prstGeom prst="rect">
             <a:avLst/>
@@ -25609,8 +25609,8 @@
         </p:nvSpPr>
         <p:spPr>
           <a:xfrm>
-            <a:off x="5357812" y="2133600"/>
-            <a:ext cx="1543050" cy="285750"/>
+            <a:off x="5529262" y="2124075"/>
+            <a:ext cx="1200150" cy="304800"/>
           </a:xfrm>
           <a:prstGeom prst="roundRect">
             <a:avLst>
@@ -25657,8 +25657,8 @@
         </p:nvSpPr>
         <p:spPr>
           <a:xfrm>
-            <a:off x="5357812" y="2133600"/>
-            <a:ext cx="1543050" cy="285750"/>
+            <a:off x="5529262" y="2124075"/>
+            <a:ext cx="1200150" cy="304800"/>
           </a:xfrm>
           <a:prstGeom prst="rect">
             <a:avLst/>
@@ -25683,7 +25683,7 @@
                 </a:solidFill>
                 <a:latin typeface="PingFang SC"/>
               </a:rPr>
-              <a:t>approv</a:t>
+              <a:t>approved</a:t>
             </a:r>
           </a:p>
         </p:txBody>
@@ -25775,8 +25775,8 @@
         </p:nvSpPr>
         <p:spPr>
           <a:xfrm>
-            <a:off x="7905750" y="2814637"/>
-            <a:ext cx="1333500" cy="285750"/>
+            <a:off x="7958138" y="2805112"/>
+            <a:ext cx="1228725" cy="304800"/>
           </a:xfrm>
           <a:prstGeom prst="roundRect">
             <a:avLst>
@@ -25823,8 +25823,8 @@
         </p:nvSpPr>
         <p:spPr>
           <a:xfrm>
-            <a:off x="7905750" y="2814637"/>
-            <a:ext cx="1333500" cy="285750"/>
+            <a:off x="7958138" y="2805112"/>
+            <a:ext cx="1228725" cy="304800"/>
           </a:xfrm>
           <a:prstGeom prst="rect">
             <a:avLst/>
@@ -25941,8 +25941,8 @@
         </p:nvSpPr>
         <p:spPr>
           <a:xfrm>
-            <a:off x="2847975" y="2814637"/>
-            <a:ext cx="1543050" cy="285750"/>
+            <a:off x="3128963" y="2805112"/>
+            <a:ext cx="981075" cy="304800"/>
           </a:xfrm>
           <a:prstGeom prst="roundRect">
             <a:avLst>
@@ -25989,8 +25989,8 @@
         </p:nvSpPr>
         <p:spPr>
           <a:xfrm>
-            <a:off x="2847975" y="2814637"/>
-            <a:ext cx="1543050" cy="285750"/>
+            <a:off x="3128963" y="2805112"/>
+            <a:ext cx="981075" cy="304800"/>
           </a:xfrm>
           <a:prstGeom prst="rect">
             <a:avLst/>
